--- a/Documents/Real Time Device to Device Wireless Communication System Using ESP NOW Protocol.pptx
+++ b/Documents/Real Time Device to Device Wireless Communication System Using ESP NOW Protocol.pptx
@@ -1,28 +1,28 @@
 
 <file path=ppt/presentation.xml><?xml version="1.0" encoding="utf-8"?>
-<p:presentation xmlns:a="http://schemas.openxmlformats.org/drawingml/2006/main" xmlns:r="http://schemas.openxmlformats.org/officeDocument/2006/relationships" xmlns:p="http://schemas.openxmlformats.org/presentationml/2006/main" autoCompressPictures="0">
+<p:presentation xmlns:a="http://schemas.openxmlformats.org/drawingml/2006/main" xmlns:r="http://schemas.openxmlformats.org/officeDocument/2006/relationships" xmlns:p="http://schemas.openxmlformats.org/presentationml/2006/main" saveSubsetFonts="1" autoCompressPictures="0">
   <p:sldMasterIdLst>
     <p:sldMasterId id="2147483648" r:id="rId1"/>
   </p:sldMasterIdLst>
   <p:notesMasterIdLst>
-    <p:notesMasterId r:id="rId4"/>
+    <p:notesMasterId r:id="rId17"/>
   </p:notesMasterIdLst>
   <p:sldIdLst>
-    <p:sldId id="256" r:id="rId3"/>
-    <p:sldId id="257" r:id="rId5"/>
-    <p:sldId id="258" r:id="rId6"/>
-    <p:sldId id="259" r:id="rId7"/>
-    <p:sldId id="260" r:id="rId8"/>
-    <p:sldId id="261" r:id="rId9"/>
-    <p:sldId id="262" r:id="rId10"/>
-    <p:sldId id="263" r:id="rId11"/>
-    <p:sldId id="264" r:id="rId12"/>
-    <p:sldId id="265" r:id="rId13"/>
-    <p:sldId id="266" r:id="rId14"/>
-    <p:sldId id="267" r:id="rId15"/>
-    <p:sldId id="268" r:id="rId16"/>
-    <p:sldId id="269" r:id="rId17"/>
-    <p:sldId id="270" r:id="rId18"/>
+    <p:sldId id="256" r:id="rId2"/>
+    <p:sldId id="257" r:id="rId3"/>
+    <p:sldId id="258" r:id="rId4"/>
+    <p:sldId id="259" r:id="rId5"/>
+    <p:sldId id="260" r:id="rId6"/>
+    <p:sldId id="261" r:id="rId7"/>
+    <p:sldId id="262" r:id="rId8"/>
+    <p:sldId id="263" r:id="rId9"/>
+    <p:sldId id="264" r:id="rId10"/>
+    <p:sldId id="265" r:id="rId11"/>
+    <p:sldId id="266" r:id="rId12"/>
+    <p:sldId id="267" r:id="rId13"/>
+    <p:sldId id="268" r:id="rId14"/>
+    <p:sldId id="269" r:id="rId15"/>
+    <p:sldId id="270" r:id="rId16"/>
   </p:sldIdLst>
   <p:sldSz cx="12192000" cy="6858000"/>
   <p:notesSz cx="6858000" cy="12192000"/>
@@ -118,6 +118,11 @@
       </a:defRPr>
     </a:lvl9pPr>
   </p:defaultTextStyle>
+  <p:extLst>
+    <p:ext uri="{EFAFB233-063F-42B5-8137-9DF3F51BA10A}">
+      <p15:sldGuideLst xmlns:p15="http://schemas.microsoft.com/office/powerpoint/2012/main"/>
+    </p:ext>
+  </p:extLst>
 </p:presentation>
 </file>
 
@@ -144,6 +149,11 @@
         </a:xfrm>
       </p:grpSpPr>
     </p:spTree>
+    <p:extLst>
+      <p:ext uri="{BB962C8B-B14F-4D97-AF65-F5344CB8AC3E}">
+        <p14:creationId xmlns:p14="http://schemas.microsoft.com/office/powerpoint/2010/main" val="3902147142"/>
+      </p:ext>
+    </p:extLst>
   </p:cSld>
   <p:clrMap bg1="lt1" tx1="dk1" bg2="lt2" tx2="dk2" accent1="accent1" accent2="accent2" accent3="accent3" accent4="accent4" accent5="accent5" accent6="accent6" hlink="hlink" folHlink="folHlink"/>
   <p:notesStyle>
@@ -306,12 +316,18 @@
           <a:p>
             <a:fld id="{F7021451-1387-4CA6-816F-3879F97B5CBC}" type="slidenum">
               <a:rPr lang="en-US"/>
+              <a:t>1</a:t>
             </a:fld>
             <a:endParaRPr lang="en-US"/>
           </a:p>
         </p:txBody>
       </p:sp>
     </p:spTree>
+    <p:extLst>
+      <p:ext uri="{BB962C8B-B14F-4D97-AF65-F5344CB8AC3E}">
+        <p14:creationId xmlns:p14="http://schemas.microsoft.com/office/powerpoint/2010/main" val="1024086991"/>
+      </p:ext>
+    </p:extLst>
   </p:cSld>
   <p:clrMapOvr>
     <a:masterClrMapping/>
@@ -384,12 +400,18 @@
           <a:p>
             <a:fld id="{F7021451-1387-4CA6-816F-3879F97B5CBC}" type="slidenum">
               <a:rPr lang="en-US"/>
+              <a:t>10</a:t>
             </a:fld>
             <a:endParaRPr lang="en-US"/>
           </a:p>
         </p:txBody>
       </p:sp>
     </p:spTree>
+    <p:extLst>
+      <p:ext uri="{BB962C8B-B14F-4D97-AF65-F5344CB8AC3E}">
+        <p14:creationId xmlns:p14="http://schemas.microsoft.com/office/powerpoint/2010/main" val="1024086991"/>
+      </p:ext>
+    </p:extLst>
   </p:cSld>
   <p:clrMapOvr>
     <a:masterClrMapping/>
@@ -462,12 +484,18 @@
           <a:p>
             <a:fld id="{F7021451-1387-4CA6-816F-3879F97B5CBC}" type="slidenum">
               <a:rPr lang="en-US"/>
+              <a:t>11</a:t>
             </a:fld>
             <a:endParaRPr lang="en-US"/>
           </a:p>
         </p:txBody>
       </p:sp>
     </p:spTree>
+    <p:extLst>
+      <p:ext uri="{BB962C8B-B14F-4D97-AF65-F5344CB8AC3E}">
+        <p14:creationId xmlns:p14="http://schemas.microsoft.com/office/powerpoint/2010/main" val="1024086991"/>
+      </p:ext>
+    </p:extLst>
   </p:cSld>
   <p:clrMapOvr>
     <a:masterClrMapping/>
@@ -540,12 +568,18 @@
           <a:p>
             <a:fld id="{F7021451-1387-4CA6-816F-3879F97B5CBC}" type="slidenum">
               <a:rPr lang="en-US"/>
+              <a:t>12</a:t>
             </a:fld>
             <a:endParaRPr lang="en-US"/>
           </a:p>
         </p:txBody>
       </p:sp>
     </p:spTree>
+    <p:extLst>
+      <p:ext uri="{BB962C8B-B14F-4D97-AF65-F5344CB8AC3E}">
+        <p14:creationId xmlns:p14="http://schemas.microsoft.com/office/powerpoint/2010/main" val="1024086991"/>
+      </p:ext>
+    </p:extLst>
   </p:cSld>
   <p:clrMapOvr>
     <a:masterClrMapping/>
@@ -618,12 +652,18 @@
           <a:p>
             <a:fld id="{F7021451-1387-4CA6-816F-3879F97B5CBC}" type="slidenum">
               <a:rPr lang="en-US"/>
+              <a:t>13</a:t>
             </a:fld>
             <a:endParaRPr lang="en-US"/>
           </a:p>
         </p:txBody>
       </p:sp>
     </p:spTree>
+    <p:extLst>
+      <p:ext uri="{BB962C8B-B14F-4D97-AF65-F5344CB8AC3E}">
+        <p14:creationId xmlns:p14="http://schemas.microsoft.com/office/powerpoint/2010/main" val="1024086991"/>
+      </p:ext>
+    </p:extLst>
   </p:cSld>
   <p:clrMapOvr>
     <a:masterClrMapping/>
@@ -696,12 +736,18 @@
           <a:p>
             <a:fld id="{F7021451-1387-4CA6-816F-3879F97B5CBC}" type="slidenum">
               <a:rPr lang="en-US"/>
+              <a:t>14</a:t>
             </a:fld>
             <a:endParaRPr lang="en-US"/>
           </a:p>
         </p:txBody>
       </p:sp>
     </p:spTree>
+    <p:extLst>
+      <p:ext uri="{BB962C8B-B14F-4D97-AF65-F5344CB8AC3E}">
+        <p14:creationId xmlns:p14="http://schemas.microsoft.com/office/powerpoint/2010/main" val="1024086991"/>
+      </p:ext>
+    </p:extLst>
   </p:cSld>
   <p:clrMapOvr>
     <a:masterClrMapping/>
@@ -774,12 +820,18 @@
           <a:p>
             <a:fld id="{F7021451-1387-4CA6-816F-3879F97B5CBC}" type="slidenum">
               <a:rPr lang="en-US"/>
+              <a:t>15</a:t>
             </a:fld>
             <a:endParaRPr lang="en-US"/>
           </a:p>
         </p:txBody>
       </p:sp>
     </p:spTree>
+    <p:extLst>
+      <p:ext uri="{BB962C8B-B14F-4D97-AF65-F5344CB8AC3E}">
+        <p14:creationId xmlns:p14="http://schemas.microsoft.com/office/powerpoint/2010/main" val="1024086991"/>
+      </p:ext>
+    </p:extLst>
   </p:cSld>
   <p:clrMapOvr>
     <a:masterClrMapping/>
@@ -852,12 +904,18 @@
           <a:p>
             <a:fld id="{F7021451-1387-4CA6-816F-3879F97B5CBC}" type="slidenum">
               <a:rPr lang="en-US"/>
+              <a:t>2</a:t>
             </a:fld>
             <a:endParaRPr lang="en-US"/>
           </a:p>
         </p:txBody>
       </p:sp>
     </p:spTree>
+    <p:extLst>
+      <p:ext uri="{BB962C8B-B14F-4D97-AF65-F5344CB8AC3E}">
+        <p14:creationId xmlns:p14="http://schemas.microsoft.com/office/powerpoint/2010/main" val="1024086991"/>
+      </p:ext>
+    </p:extLst>
   </p:cSld>
   <p:clrMapOvr>
     <a:masterClrMapping/>
@@ -930,12 +988,18 @@
           <a:p>
             <a:fld id="{F7021451-1387-4CA6-816F-3879F97B5CBC}" type="slidenum">
               <a:rPr lang="en-US"/>
+              <a:t>3</a:t>
             </a:fld>
             <a:endParaRPr lang="en-US"/>
           </a:p>
         </p:txBody>
       </p:sp>
     </p:spTree>
+    <p:extLst>
+      <p:ext uri="{BB962C8B-B14F-4D97-AF65-F5344CB8AC3E}">
+        <p14:creationId xmlns:p14="http://schemas.microsoft.com/office/powerpoint/2010/main" val="1024086991"/>
+      </p:ext>
+    </p:extLst>
   </p:cSld>
   <p:clrMapOvr>
     <a:masterClrMapping/>
@@ -1008,12 +1072,18 @@
           <a:p>
             <a:fld id="{F7021451-1387-4CA6-816F-3879F97B5CBC}" type="slidenum">
               <a:rPr lang="en-US"/>
+              <a:t>4</a:t>
             </a:fld>
             <a:endParaRPr lang="en-US"/>
           </a:p>
         </p:txBody>
       </p:sp>
     </p:spTree>
+    <p:extLst>
+      <p:ext uri="{BB962C8B-B14F-4D97-AF65-F5344CB8AC3E}">
+        <p14:creationId xmlns:p14="http://schemas.microsoft.com/office/powerpoint/2010/main" val="1024086991"/>
+      </p:ext>
+    </p:extLst>
   </p:cSld>
   <p:clrMapOvr>
     <a:masterClrMapping/>
@@ -1086,12 +1156,18 @@
           <a:p>
             <a:fld id="{F7021451-1387-4CA6-816F-3879F97B5CBC}" type="slidenum">
               <a:rPr lang="en-US"/>
+              <a:t>5</a:t>
             </a:fld>
             <a:endParaRPr lang="en-US"/>
           </a:p>
         </p:txBody>
       </p:sp>
     </p:spTree>
+    <p:extLst>
+      <p:ext uri="{BB962C8B-B14F-4D97-AF65-F5344CB8AC3E}">
+        <p14:creationId xmlns:p14="http://schemas.microsoft.com/office/powerpoint/2010/main" val="1024086991"/>
+      </p:ext>
+    </p:extLst>
   </p:cSld>
   <p:clrMapOvr>
     <a:masterClrMapping/>
@@ -1164,12 +1240,18 @@
           <a:p>
             <a:fld id="{F7021451-1387-4CA6-816F-3879F97B5CBC}" type="slidenum">
               <a:rPr lang="en-US"/>
+              <a:t>6</a:t>
             </a:fld>
             <a:endParaRPr lang="en-US"/>
           </a:p>
         </p:txBody>
       </p:sp>
     </p:spTree>
+    <p:extLst>
+      <p:ext uri="{BB962C8B-B14F-4D97-AF65-F5344CB8AC3E}">
+        <p14:creationId xmlns:p14="http://schemas.microsoft.com/office/powerpoint/2010/main" val="1024086991"/>
+      </p:ext>
+    </p:extLst>
   </p:cSld>
   <p:clrMapOvr>
     <a:masterClrMapping/>
@@ -1242,12 +1324,18 @@
           <a:p>
             <a:fld id="{F7021451-1387-4CA6-816F-3879F97B5CBC}" type="slidenum">
               <a:rPr lang="en-US"/>
+              <a:t>7</a:t>
             </a:fld>
             <a:endParaRPr lang="en-US"/>
           </a:p>
         </p:txBody>
       </p:sp>
     </p:spTree>
+    <p:extLst>
+      <p:ext uri="{BB962C8B-B14F-4D97-AF65-F5344CB8AC3E}">
+        <p14:creationId xmlns:p14="http://schemas.microsoft.com/office/powerpoint/2010/main" val="1024086991"/>
+      </p:ext>
+    </p:extLst>
   </p:cSld>
   <p:clrMapOvr>
     <a:masterClrMapping/>
@@ -1320,12 +1408,18 @@
           <a:p>
             <a:fld id="{F7021451-1387-4CA6-816F-3879F97B5CBC}" type="slidenum">
               <a:rPr lang="en-US"/>
+              <a:t>8</a:t>
             </a:fld>
             <a:endParaRPr lang="en-US"/>
           </a:p>
         </p:txBody>
       </p:sp>
     </p:spTree>
+    <p:extLst>
+      <p:ext uri="{BB962C8B-B14F-4D97-AF65-F5344CB8AC3E}">
+        <p14:creationId xmlns:p14="http://schemas.microsoft.com/office/powerpoint/2010/main" val="1024086991"/>
+      </p:ext>
+    </p:extLst>
   </p:cSld>
   <p:clrMapOvr>
     <a:masterClrMapping/>
@@ -1398,12 +1492,18 @@
           <a:p>
             <a:fld id="{F7021451-1387-4CA6-816F-3879F97B5CBC}" type="slidenum">
               <a:rPr lang="en-US"/>
+              <a:t>9</a:t>
             </a:fld>
             <a:endParaRPr lang="en-US"/>
           </a:p>
         </p:txBody>
       </p:sp>
     </p:spTree>
+    <p:extLst>
+      <p:ext uri="{BB962C8B-B14F-4D97-AF65-F5344CB8AC3E}">
+        <p14:creationId xmlns:p14="http://schemas.microsoft.com/office/powerpoint/2010/main" val="1024086991"/>
+      </p:ext>
+    </p:extLst>
   </p:cSld>
   <p:clrMapOvr>
     <a:masterClrMapping/>
@@ -1492,7 +1592,7 @@
         <a:spcBef>
           <a:spcPct val="20000"/>
         </a:spcBef>
-        <a:buFont typeface="Arial" panose="02080604020202020204" pitchFamily="34" charset="0"/>
+        <a:buFont typeface="Arial" pitchFamily="34" charset="0"/>
         <a:buChar char="•"/>
         <a:defRPr sz="3200" kern="1200">
           <a:solidFill>
@@ -1507,7 +1607,7 @@
         <a:spcBef>
           <a:spcPct val="20000"/>
         </a:spcBef>
-        <a:buFont typeface="Arial" panose="02080604020202020204" pitchFamily="34" charset="0"/>
+        <a:buFont typeface="Arial" pitchFamily="34" charset="0"/>
         <a:buChar char="–"/>
         <a:defRPr sz="2800" kern="1200">
           <a:solidFill>
@@ -1522,7 +1622,7 @@
         <a:spcBef>
           <a:spcPct val="20000"/>
         </a:spcBef>
-        <a:buFont typeface="Arial" panose="02080604020202020204" pitchFamily="34" charset="0"/>
+        <a:buFont typeface="Arial" pitchFamily="34" charset="0"/>
         <a:buChar char="•"/>
         <a:defRPr sz="2400" kern="1200">
           <a:solidFill>
@@ -1537,7 +1637,7 @@
         <a:spcBef>
           <a:spcPct val="20000"/>
         </a:spcBef>
-        <a:buFont typeface="Arial" panose="02080604020202020204" pitchFamily="34" charset="0"/>
+        <a:buFont typeface="Arial" pitchFamily="34" charset="0"/>
         <a:buChar char="–"/>
         <a:defRPr sz="2000" kern="1200">
           <a:solidFill>
@@ -1552,7 +1652,7 @@
         <a:spcBef>
           <a:spcPct val="20000"/>
         </a:spcBef>
-        <a:buFont typeface="Arial" panose="02080604020202020204" pitchFamily="34" charset="0"/>
+        <a:buFont typeface="Arial" pitchFamily="34" charset="0"/>
         <a:buChar char="»"/>
         <a:defRPr sz="2000" kern="1200">
           <a:solidFill>
@@ -1567,7 +1667,7 @@
         <a:spcBef>
           <a:spcPct val="20000"/>
         </a:spcBef>
-        <a:buFont typeface="Arial" panose="02080604020202020204" pitchFamily="34" charset="0"/>
+        <a:buFont typeface="Arial" pitchFamily="34" charset="0"/>
         <a:buChar char="•"/>
         <a:defRPr sz="2000" kern="1200">
           <a:solidFill>
@@ -1582,7 +1682,7 @@
         <a:spcBef>
           <a:spcPct val="20000"/>
         </a:spcBef>
-        <a:buFont typeface="Arial" panose="02080604020202020204" pitchFamily="34" charset="0"/>
+        <a:buFont typeface="Arial" pitchFamily="34" charset="0"/>
         <a:buChar char="•"/>
         <a:defRPr sz="2000" kern="1200">
           <a:solidFill>
@@ -1597,7 +1697,7 @@
         <a:spcBef>
           <a:spcPct val="20000"/>
         </a:spcBef>
-        <a:buFont typeface="Arial" panose="02080604020202020204" pitchFamily="34" charset="0"/>
+        <a:buFont typeface="Arial" pitchFamily="34" charset="0"/>
         <a:buChar char="•"/>
         <a:defRPr sz="2000" kern="1200">
           <a:solidFill>
@@ -1612,7 +1712,7 @@
         <a:spcBef>
           <a:spcPct val="20000"/>
         </a:spcBef>
-        <a:buFont typeface="Arial" panose="02080604020202020204" pitchFamily="34" charset="0"/>
+        <a:buFont typeface="Arial" pitchFamily="34" charset="0"/>
         <a:buChar char="•"/>
         <a:defRPr sz="2000" kern="1200">
           <a:solidFill>
@@ -1725,7 +1825,7 @@
 
 <file path=ppt/slides/slide1.xml><?xml version="1.0" encoding="utf-8"?>
 <p:sld xmlns:a="http://schemas.openxmlformats.org/drawingml/2006/main" xmlns:r="http://schemas.openxmlformats.org/officeDocument/2006/relationships" xmlns:p="http://schemas.openxmlformats.org/presentationml/2006/main">
-  <p:cSld>
+  <p:cSld name="Slide 1">
     <p:bg>
       <p:bgPr>
         <a:solidFill>
@@ -1767,6 +1867,7 @@
               <a:alpha val="45000"/>
             </a:srgbClr>
           </a:solidFill>
+          <a:ln/>
         </p:spPr>
       </p:sp>
       <p:sp>
@@ -1788,6 +1889,7 @@
               <a:alpha val="30000"/>
             </a:srgbClr>
           </a:solidFill>
+          <a:ln/>
         </p:spPr>
       </p:sp>
       <p:sp>
@@ -1805,6 +1907,7 @@
             <a:avLst/>
           </a:prstGeom>
           <a:noFill/>
+          <a:ln/>
         </p:spPr>
         <p:txBody>
           <a:bodyPr wrap="square" rtlCol="0" anchor="ctr"/>
@@ -1843,6 +1946,7 @@
             <a:avLst/>
           </a:prstGeom>
           <a:noFill/>
+          <a:ln/>
         </p:spPr>
         <p:txBody>
           <a:bodyPr wrap="square" rtlCol="0" anchor="ctr"/>
@@ -1924,6 +2028,7 @@
             <a:avLst/>
           </a:prstGeom>
           <a:noFill/>
+          <a:ln/>
         </p:spPr>
         <p:txBody>
           <a:bodyPr wrap="square" rtlCol="0" anchor="ctr"/>
@@ -2002,6 +2107,7 @@
             <a:avLst/>
           </a:prstGeom>
           <a:noFill/>
+          <a:ln/>
         </p:spPr>
         <p:txBody>
           <a:bodyPr wrap="square" rtlCol="0" anchor="t"/>
@@ -2062,7 +2168,29 @@
                 <a:ea typeface="Calibri" pitchFamily="34" charset="-122"/>
                 <a:cs typeface="Calibri" pitchFamily="34" charset="-120"/>
               </a:rPr>
-              <a:t>Supervisor: Dr. Israr Akhter</a:t>
+              <a:t>Supervisor</a:t>
+            </a:r>
+            <a:r>
+              <a:rPr lang="en-US" sz="1300">
+                <a:solidFill>
+                  <a:srgbClr val="C9E4E6"/>
+                </a:solidFill>
+                <a:latin typeface="Calibri" pitchFamily="34" charset="0"/>
+                <a:ea typeface="Calibri" pitchFamily="34" charset="-122"/>
+                <a:cs typeface="Calibri" pitchFamily="34" charset="-120"/>
+              </a:rPr>
+              <a:t>: Israr </a:t>
+            </a:r>
+            <a:r>
+              <a:rPr lang="en-US" sz="1300" dirty="0">
+                <a:solidFill>
+                  <a:srgbClr val="C9E4E6"/>
+                </a:solidFill>
+                <a:latin typeface="Calibri" pitchFamily="34" charset="0"/>
+                <a:ea typeface="Calibri" pitchFamily="34" charset="-122"/>
+                <a:cs typeface="Calibri" pitchFamily="34" charset="-120"/>
+              </a:rPr>
+              <a:t>Akhter</a:t>
             </a:r>
             <a:endParaRPr lang="en-US" sz="1600" dirty="0"/>
           </a:p>
@@ -2110,6 +2238,7 @@
             <a:avLst/>
           </a:prstGeom>
           <a:noFill/>
+          <a:ln/>
         </p:spPr>
         <p:txBody>
           <a:bodyPr wrap="square" rtlCol="0" anchor="ctr"/>
@@ -2136,7 +2265,7 @@
               <a:buNone/>
             </a:pPr>
             <a:r>
-              <a:rPr lang="en-US" sz="1600" b="1" dirty="0">
+              <a:rPr lang="en-US" sz="1600" b="1">
                 <a:solidFill>
                   <a:srgbClr val="FFFFFF"/>
                 </a:solidFill>
@@ -2144,7 +2273,18 @@
                 <a:ea typeface="Calibri" pitchFamily="34" charset="-122"/>
                 <a:cs typeface="Calibri" pitchFamily="34" charset="-120"/>
               </a:rPr>
-              <a:t>14 - 15 minutes</a:t>
+              <a:t>14 </a:t>
+            </a:r>
+            <a:r>
+              <a:rPr lang="en-US" sz="1600" b="1" dirty="0">
+                <a:solidFill>
+                  <a:srgbClr val="FFFFFF"/>
+                </a:solidFill>
+                <a:latin typeface="Calibri" pitchFamily="34" charset="0"/>
+                <a:ea typeface="Calibri" pitchFamily="34" charset="-122"/>
+                <a:cs typeface="Calibri" pitchFamily="34" charset="-120"/>
+              </a:rPr>
+              <a:t>- 15 minutes</a:t>
             </a:r>
             <a:endParaRPr lang="en-US" sz="1100" dirty="0"/>
           </a:p>
@@ -2160,7 +2300,7 @@
 
 <file path=ppt/slides/slide10.xml><?xml version="1.0" encoding="utf-8"?>
 <p:sld xmlns:a="http://schemas.openxmlformats.org/drawingml/2006/main" xmlns:r="http://schemas.openxmlformats.org/officeDocument/2006/relationships" xmlns:p="http://schemas.openxmlformats.org/presentationml/2006/main">
-  <p:cSld>
+  <p:cSld name="Slide 10">
     <p:bg>
       <p:bgPr>
         <a:solidFill>
@@ -2200,6 +2340,7 @@
           <a:solidFill>
             <a:srgbClr val="028090"/>
           </a:solidFill>
+          <a:ln/>
         </p:spPr>
       </p:sp>
       <p:sp>
@@ -2217,6 +2358,7 @@
             <a:avLst/>
           </a:prstGeom>
           <a:noFill/>
+          <a:ln/>
         </p:spPr>
         <p:txBody>
           <a:bodyPr wrap="square" rtlCol="0" anchor="ctr"/>
@@ -2259,6 +2401,7 @@
           <a:solidFill>
             <a:srgbClr val="028090"/>
           </a:solidFill>
+          <a:ln/>
         </p:spPr>
       </p:sp>
       <p:sp>
@@ -2276,6 +2419,7 @@
             <a:avLst/>
           </a:prstGeom>
           <a:noFill/>
+          <a:ln/>
         </p:spPr>
         <p:txBody>
           <a:bodyPr wrap="square" rtlCol="0" anchor="ctr"/>
@@ -2314,6 +2458,7 @@
             <a:avLst/>
           </a:prstGeom>
           <a:noFill/>
+          <a:ln/>
         </p:spPr>
         <p:txBody>
           <a:bodyPr wrap="square" rtlCol="0" anchor="ctr"/>
@@ -2352,6 +2497,7 @@
             <a:avLst/>
           </a:prstGeom>
           <a:noFill/>
+          <a:ln/>
         </p:spPr>
         <p:txBody>
           <a:bodyPr wrap="square" rtlCol="0" anchor="t"/>
@@ -2457,6 +2603,7 @@
             <a:avLst/>
           </a:prstGeom>
           <a:noFill/>
+          <a:ln/>
         </p:spPr>
         <p:txBody>
           <a:bodyPr wrap="square" rtlCol="0" anchor="ctr"/>
@@ -2495,6 +2642,7 @@
             <a:avLst/>
           </a:prstGeom>
           <a:noFill/>
+          <a:ln/>
         </p:spPr>
         <p:txBody>
           <a:bodyPr wrap="square" rtlCol="0" anchor="t"/>
@@ -2604,6 +2752,7 @@
           <a:solidFill>
             <a:srgbClr val="028090"/>
           </a:solidFill>
+          <a:ln/>
         </p:spPr>
       </p:sp>
       <p:sp>
@@ -2621,6 +2770,7 @@
             <a:avLst/>
           </a:prstGeom>
           <a:noFill/>
+          <a:ln/>
         </p:spPr>
         <p:txBody>
           <a:bodyPr wrap="square" rtlCol="0" anchor="ctr"/>
@@ -2659,6 +2809,7 @@
             <a:avLst/>
           </a:prstGeom>
           <a:noFill/>
+          <a:ln/>
         </p:spPr>
         <p:txBody>
           <a:bodyPr wrap="square" rtlCol="0" anchor="ctr"/>
@@ -2692,7 +2843,7 @@
 
 <file path=ppt/slides/slide11.xml><?xml version="1.0" encoding="utf-8"?>
 <p:sld xmlns:a="http://schemas.openxmlformats.org/drawingml/2006/main" xmlns:r="http://schemas.openxmlformats.org/officeDocument/2006/relationships" xmlns:p="http://schemas.openxmlformats.org/presentationml/2006/main">
-  <p:cSld>
+  <p:cSld name="Slide 11">
     <p:bg>
       <p:bgPr>
         <a:solidFill>
@@ -2732,6 +2883,7 @@
           <a:solidFill>
             <a:srgbClr val="028090"/>
           </a:solidFill>
+          <a:ln/>
         </p:spPr>
       </p:sp>
       <p:sp>
@@ -2749,6 +2901,7 @@
             <a:avLst/>
           </a:prstGeom>
           <a:noFill/>
+          <a:ln/>
         </p:spPr>
         <p:txBody>
           <a:bodyPr wrap="square" rtlCol="0" anchor="ctr"/>
@@ -2791,6 +2944,7 @@
           <a:solidFill>
             <a:srgbClr val="028090"/>
           </a:solidFill>
+          <a:ln/>
         </p:spPr>
       </p:sp>
       <p:sp>
@@ -2808,6 +2962,7 @@
             <a:avLst/>
           </a:prstGeom>
           <a:noFill/>
+          <a:ln/>
         </p:spPr>
         <p:txBody>
           <a:bodyPr wrap="square" rtlCol="0" anchor="ctr"/>
@@ -2837,7 +2992,13 @@
           <p:cNvGraphicFramePr>
             <a:graphicFrameLocks noGrp="1"/>
           </p:cNvGraphicFramePr>
-          <p:nvPr/>
+          <p:nvPr>
+            <p:extLst>
+              <p:ext uri="{D42A27DB-BD31-4B8C-83A1-F6EECF244321}">
+                <p14:modId xmlns:p14="http://schemas.microsoft.com/office/powerpoint/2010/main" val="1579011935"/>
+              </p:ext>
+            </p:extLst>
+          </p:nvPr>
         </p:nvGraphicFramePr>
         <p:xfrm>
           <a:off x="640080" y="1508760"/>
@@ -2848,8 +3009,20 @@
             <a:tbl>
               <a:tblPr/>
               <a:tblGrid>
-                <a:gridCol w="4937760"/>
-                <a:gridCol w="5943600"/>
+                <a:gridCol w="4937760">
+                  <a:extLst>
+                    <a:ext uri="{9D8B030D-6E8A-4147-A177-3AD203B41FA5}">
+                      <a16:colId xmlns:a16="http://schemas.microsoft.com/office/drawing/2014/main" val="20000"/>
+                    </a:ext>
+                  </a:extLst>
+                </a:gridCol>
+                <a:gridCol w="5943600">
+                  <a:extLst>
+                    <a:ext uri="{9D8B030D-6E8A-4147-A177-3AD203B41FA5}">
+                      <a16:colId xmlns:a16="http://schemas.microsoft.com/office/drawing/2014/main" val="20001"/>
+                    </a:ext>
+                  </a:extLst>
+                </a:gridCol>
               </a:tblGrid>
               <a:tr h="658368">
                 <a:tc>
@@ -2872,9 +3045,9 @@
                         <a:t>Test Condition</a:t>
                       </a:r>
                       <a:endParaRPr lang="en-US" sz="1300" dirty="0">
-                        <a:latin typeface="Calibri" pitchFamily="34" charset="0"/>
-                        <a:ea typeface="Calibri" pitchFamily="34" charset="0"/>
-                        <a:cs typeface="Calibri" pitchFamily="34" charset="0"/>
+                        <a:latin typeface="Calibri" charset="0"/>
+                        <a:ea typeface="Calibri" charset="0"/>
+                        <a:cs typeface="Calibri" charset="0"/>
                       </a:endParaRPr>
                     </a:p>
                   </a:txBody>
@@ -2940,9 +3113,9 @@
                         <a:t>Observed Outcome</a:t>
                       </a:r>
                       <a:endParaRPr lang="en-US" sz="1300" dirty="0">
-                        <a:latin typeface="Calibri" pitchFamily="34" charset="0"/>
-                        <a:ea typeface="Calibri" pitchFamily="34" charset="0"/>
-                        <a:cs typeface="Calibri" pitchFamily="34" charset="0"/>
+                        <a:latin typeface="Calibri" charset="0"/>
+                        <a:ea typeface="Calibri" charset="0"/>
+                        <a:cs typeface="Calibri" charset="0"/>
                       </a:endParaRPr>
                     </a:p>
                   </a:txBody>
@@ -2988,6 +3161,11 @@
                     </a:solidFill>
                   </a:tcPr>
                 </a:tc>
+                <a:extLst>
+                  <a:ext uri="{0D108BD9-81ED-4DB2-BD59-A6C34878D82A}">
+                    <a16:rowId xmlns:a16="http://schemas.microsoft.com/office/drawing/2014/main" val="10000"/>
+                  </a:ext>
+                </a:extLst>
               </a:tr>
               <a:tr h="658368">
                 <a:tc>
@@ -3010,9 +3188,9 @@
                         <a:t>Only one sensor active</a:t>
                       </a:r>
                       <a:endParaRPr lang="en-US" sz="1250" dirty="0">
-                        <a:latin typeface="Calibri" pitchFamily="34" charset="0"/>
-                        <a:ea typeface="Calibri" pitchFamily="34" charset="0"/>
-                        <a:cs typeface="Calibri" pitchFamily="34" charset="0"/>
+                        <a:latin typeface="Calibri" charset="0"/>
+                        <a:ea typeface="Calibri" charset="0"/>
+                        <a:cs typeface="Calibri" charset="0"/>
                       </a:endParaRPr>
                     </a:p>
                   </a:txBody>
@@ -3078,9 +3256,9 @@
                         <a:t>No packet sent, Receiver stays green</a:t>
                       </a:r>
                       <a:endParaRPr lang="en-US" sz="1250" dirty="0">
-                        <a:latin typeface="Calibri" pitchFamily="34" charset="0"/>
-                        <a:ea typeface="Calibri" pitchFamily="34" charset="0"/>
-                        <a:cs typeface="Calibri" pitchFamily="34" charset="0"/>
+                        <a:latin typeface="Calibri" charset="0"/>
+                        <a:ea typeface="Calibri" charset="0"/>
+                        <a:cs typeface="Calibri" charset="0"/>
                       </a:endParaRPr>
                     </a:p>
                   </a:txBody>
@@ -3126,6 +3304,11 @@
                     </a:solidFill>
                   </a:tcPr>
                 </a:tc>
+                <a:extLst>
+                  <a:ext uri="{0D108BD9-81ED-4DB2-BD59-A6C34878D82A}">
+                    <a16:rowId xmlns:a16="http://schemas.microsoft.com/office/drawing/2014/main" val="10001"/>
+                  </a:ext>
+                </a:extLst>
               </a:tr>
               <a:tr h="658368">
                 <a:tc>
@@ -3148,9 +3331,9 @@
                         <a:t>Both sensors, object pulled away early</a:t>
                       </a:r>
                       <a:endParaRPr lang="en-US" sz="1250" dirty="0">
-                        <a:latin typeface="Calibri" pitchFamily="34" charset="0"/>
-                        <a:ea typeface="Calibri" pitchFamily="34" charset="0"/>
-                        <a:cs typeface="Calibri" pitchFamily="34" charset="0"/>
+                        <a:latin typeface="Calibri" charset="0"/>
+                        <a:ea typeface="Calibri" charset="0"/>
+                        <a:cs typeface="Calibri" charset="0"/>
                       </a:endParaRPr>
                     </a:p>
                   </a:txBody>
@@ -3216,9 +3399,9 @@
                         <a:t>Confirmation cancelled, nothing sent</a:t>
                       </a:r>
                       <a:endParaRPr lang="en-US" sz="1250" dirty="0">
-                        <a:latin typeface="Calibri" pitchFamily="34" charset="0"/>
-                        <a:ea typeface="Calibri" pitchFamily="34" charset="0"/>
-                        <a:cs typeface="Calibri" pitchFamily="34" charset="0"/>
+                        <a:latin typeface="Calibri" charset="0"/>
+                        <a:ea typeface="Calibri" charset="0"/>
+                        <a:cs typeface="Calibri" charset="0"/>
                       </a:endParaRPr>
                     </a:p>
                   </a:txBody>
@@ -3264,6 +3447,11 @@
                     </a:solidFill>
                   </a:tcPr>
                 </a:tc>
+                <a:extLst>
+                  <a:ext uri="{0D108BD9-81ED-4DB2-BD59-A6C34878D82A}">
+                    <a16:rowId xmlns:a16="http://schemas.microsoft.com/office/drawing/2014/main" val="10002"/>
+                  </a:ext>
+                </a:extLst>
               </a:tr>
               <a:tr h="658368">
                 <a:tc>
@@ -3286,9 +3474,9 @@
                         <a:t>Both sensors held steady for 1 second</a:t>
                       </a:r>
                       <a:endParaRPr lang="en-US" sz="1250" dirty="0">
-                        <a:latin typeface="Calibri" pitchFamily="34" charset="0"/>
-                        <a:ea typeface="Calibri" pitchFamily="34" charset="0"/>
-                        <a:cs typeface="Calibri" pitchFamily="34" charset="0"/>
+                        <a:latin typeface="Calibri" charset="0"/>
+                        <a:ea typeface="Calibri" charset="0"/>
+                        <a:cs typeface="Calibri" charset="0"/>
                       </a:endParaRPr>
                     </a:p>
                   </a:txBody>
@@ -3354,9 +3542,9 @@
                         <a:t>Packet sent, red LED on, one log line saved</a:t>
                       </a:r>
                       <a:endParaRPr lang="en-US" sz="1250" dirty="0">
-                        <a:latin typeface="Calibri" pitchFamily="34" charset="0"/>
-                        <a:ea typeface="Calibri" pitchFamily="34" charset="0"/>
-                        <a:cs typeface="Calibri" pitchFamily="34" charset="0"/>
+                        <a:latin typeface="Calibri" charset="0"/>
+                        <a:ea typeface="Calibri" charset="0"/>
+                        <a:cs typeface="Calibri" charset="0"/>
                       </a:endParaRPr>
                     </a:p>
                   </a:txBody>
@@ -3402,6 +3590,11 @@
                     </a:solidFill>
                   </a:tcPr>
                 </a:tc>
+                <a:extLst>
+                  <a:ext uri="{0D108BD9-81ED-4DB2-BD59-A6C34878D82A}">
+                    <a16:rowId xmlns:a16="http://schemas.microsoft.com/office/drawing/2014/main" val="10003"/>
+                  </a:ext>
+                </a:extLst>
               </a:tr>
               <a:tr h="658368">
                 <a:tc>
@@ -3424,9 +3617,9 @@
                         <a:t>Detection held for 10+ seconds</a:t>
                       </a:r>
                       <a:endParaRPr lang="en-US" sz="1250" dirty="0">
-                        <a:latin typeface="Calibri" pitchFamily="34" charset="0"/>
-                        <a:ea typeface="Calibri" pitchFamily="34" charset="0"/>
-                        <a:cs typeface="Calibri" pitchFamily="34" charset="0"/>
+                        <a:latin typeface="Calibri" charset="0"/>
+                        <a:ea typeface="Calibri" charset="0"/>
+                        <a:cs typeface="Calibri" charset="0"/>
                       </a:endParaRPr>
                     </a:p>
                   </a:txBody>
@@ -3492,9 +3685,9 @@
                         <a:t>Cooldown keeps message rate low, red LED steady</a:t>
                       </a:r>
                       <a:endParaRPr lang="en-US" sz="1250" dirty="0">
-                        <a:latin typeface="Calibri" pitchFamily="34" charset="0"/>
-                        <a:ea typeface="Calibri" pitchFamily="34" charset="0"/>
-                        <a:cs typeface="Calibri" pitchFamily="34" charset="0"/>
+                        <a:latin typeface="Calibri" charset="0"/>
+                        <a:ea typeface="Calibri" charset="0"/>
+                        <a:cs typeface="Calibri" charset="0"/>
                       </a:endParaRPr>
                     </a:p>
                   </a:txBody>
@@ -3540,6 +3733,11 @@
                     </a:solidFill>
                   </a:tcPr>
                 </a:tc>
+                <a:extLst>
+                  <a:ext uri="{0D108BD9-81ED-4DB2-BD59-A6C34878D82A}">
+                    <a16:rowId xmlns:a16="http://schemas.microsoft.com/office/drawing/2014/main" val="10004"/>
+                  </a:ext>
+                </a:extLst>
               </a:tr>
               <a:tr h="658368">
                 <a:tc>
@@ -3562,9 +3760,9 @@
                         <a:t>Sender powered off or out of range</a:t>
                       </a:r>
                       <a:endParaRPr lang="en-US" sz="1250" dirty="0">
-                        <a:latin typeface="Calibri" pitchFamily="34" charset="0"/>
-                        <a:ea typeface="Calibri" pitchFamily="34" charset="0"/>
-                        <a:cs typeface="Calibri" pitchFamily="34" charset="0"/>
+                        <a:latin typeface="Calibri" charset="0"/>
+                        <a:ea typeface="Calibri" charset="0"/>
+                        <a:cs typeface="Calibri" charset="0"/>
                       </a:endParaRPr>
                     </a:p>
                   </a:txBody>
@@ -3630,9 +3828,9 @@
                         <a:t>Receiver falls back to green after 4 seconds</a:t>
                       </a:r>
                       <a:endParaRPr lang="en-US" sz="1250" dirty="0">
-                        <a:latin typeface="Calibri" pitchFamily="34" charset="0"/>
-                        <a:ea typeface="Calibri" pitchFamily="34" charset="0"/>
-                        <a:cs typeface="Calibri" pitchFamily="34" charset="0"/>
+                        <a:latin typeface="Calibri" charset="0"/>
+                        <a:ea typeface="Calibri" charset="0"/>
+                        <a:cs typeface="Calibri" charset="0"/>
                       </a:endParaRPr>
                     </a:p>
                   </a:txBody>
@@ -3678,6 +3876,11 @@
                     </a:solidFill>
                   </a:tcPr>
                 </a:tc>
+                <a:extLst>
+                  <a:ext uri="{0D108BD9-81ED-4DB2-BD59-A6C34878D82A}">
+                    <a16:rowId xmlns:a16="http://schemas.microsoft.com/office/drawing/2014/main" val="10005"/>
+                  </a:ext>
+                </a:extLst>
               </a:tr>
             </a:tbl>
           </a:graphicData>
@@ -3702,6 +3905,7 @@
           <a:solidFill>
             <a:srgbClr val="02C39A"/>
           </a:solidFill>
+          <a:ln/>
         </p:spPr>
       </p:sp>
       <p:sp>
@@ -3719,6 +3923,7 @@
             <a:avLst/>
           </a:prstGeom>
           <a:noFill/>
+          <a:ln/>
         </p:spPr>
         <p:txBody>
           <a:bodyPr wrap="square" rtlCol="0" anchor="ctr"/>
@@ -3757,6 +3962,7 @@
             <a:avLst/>
           </a:prstGeom>
           <a:noFill/>
+          <a:ln/>
         </p:spPr>
         <p:txBody>
           <a:bodyPr wrap="square" rtlCol="0" anchor="ctr"/>
@@ -3790,7 +3996,7 @@
 
 <file path=ppt/slides/slide12.xml><?xml version="1.0" encoding="utf-8"?>
 <p:sld xmlns:a="http://schemas.openxmlformats.org/drawingml/2006/main" xmlns:r="http://schemas.openxmlformats.org/officeDocument/2006/relationships" xmlns:p="http://schemas.openxmlformats.org/presentationml/2006/main">
-  <p:cSld>
+  <p:cSld name="Slide 12">
     <p:bg>
       <p:bgPr>
         <a:solidFill>
@@ -3830,6 +4036,7 @@
           <a:solidFill>
             <a:srgbClr val="028090"/>
           </a:solidFill>
+          <a:ln/>
         </p:spPr>
       </p:sp>
       <p:sp>
@@ -3847,6 +4054,7 @@
             <a:avLst/>
           </a:prstGeom>
           <a:noFill/>
+          <a:ln/>
         </p:spPr>
         <p:txBody>
           <a:bodyPr wrap="square" rtlCol="0" anchor="ctr"/>
@@ -3874,21 +4082,26 @@
         <p:nvPicPr>
           <p:cNvPr id="17" name="WhatsApp Video 2026-07-13 at 6.59.28 PM">
             <a:hlinkClick r:id="" action="ppaction://media"/>
+            <a:extLst>
+              <a:ext uri="{FF2B5EF4-FFF2-40B4-BE49-F238E27FC236}">
+                <a16:creationId xmlns:a16="http://schemas.microsoft.com/office/drawing/2014/main" id="{331FCB13-23E5-04D6-BC91-FC701477060E}"/>
+              </a:ext>
+            </a:extLst>
           </p:cNvPr>
           <p:cNvPicPr>
             <a:picLocks noChangeAspect="1"/>
           </p:cNvPicPr>
           <p:nvPr>
-            <a:videoFile r:link="rId1"/>
+            <a:videoFile r:link="rId2"/>
             <p:extLst>
               <p:ext uri="{DAA4B4D4-6D71-4841-9C94-3DE7FCFB9230}">
-                <p14:media xmlns:p14="http://schemas.microsoft.com/office/powerpoint/2010/main" r:embed="rId2"/>
+                <p14:media xmlns:p14="http://schemas.microsoft.com/office/powerpoint/2010/main" r:embed="rId1"/>
               </p:ext>
             </p:extLst>
           </p:nvPr>
         </p:nvPicPr>
         <p:blipFill>
-          <a:blip r:embed="rId3"/>
+          <a:blip r:embed="rId5"/>
           <a:stretch>
             <a:fillRect/>
           </a:stretch>
@@ -3905,7 +4118,13 @@
       </p:pic>
       <p:sp>
         <p:nvSpPr>
-          <p:cNvPr id="19" name="Text 3"/>
+          <p:cNvPr id="19" name="Text 3">
+            <a:extLst>
+              <a:ext uri="{FF2B5EF4-FFF2-40B4-BE49-F238E27FC236}">
+                <a16:creationId xmlns:a16="http://schemas.microsoft.com/office/drawing/2014/main" id="{B7933C61-D2AD-7B3A-5482-5B70285A7BA2}"/>
+              </a:ext>
+            </a:extLst>
+          </p:cNvPr>
           <p:cNvSpPr/>
           <p:nvPr/>
         </p:nvSpPr>
@@ -3918,6 +4137,7 @@
             <a:avLst/>
           </a:prstGeom>
           <a:noFill/>
+          <a:ln/>
         </p:spPr>
         <p:txBody>
           <a:bodyPr wrap="square" rtlCol="0" anchor="ctr"/>
@@ -4086,7 +4306,7 @@
 
 <file path=ppt/slides/slide13.xml><?xml version="1.0" encoding="utf-8"?>
 <p:sld xmlns:a="http://schemas.openxmlformats.org/drawingml/2006/main" xmlns:r="http://schemas.openxmlformats.org/officeDocument/2006/relationships" xmlns:p="http://schemas.openxmlformats.org/presentationml/2006/main">
-  <p:cSld>
+  <p:cSld name="Slide 13">
     <p:bg>
       <p:bgPr>
         <a:solidFill>
@@ -4126,6 +4346,7 @@
           <a:solidFill>
             <a:srgbClr val="028090"/>
           </a:solidFill>
+          <a:ln/>
         </p:spPr>
       </p:sp>
       <p:sp>
@@ -4143,6 +4364,7 @@
             <a:avLst/>
           </a:prstGeom>
           <a:noFill/>
+          <a:ln/>
         </p:spPr>
         <p:txBody>
           <a:bodyPr wrap="square" rtlCol="0" anchor="ctr"/>
@@ -4185,6 +4407,7 @@
           <a:solidFill>
             <a:srgbClr val="028090"/>
           </a:solidFill>
+          <a:ln/>
         </p:spPr>
       </p:sp>
       <p:sp>
@@ -4202,6 +4425,7 @@
             <a:avLst/>
           </a:prstGeom>
           <a:noFill/>
+          <a:ln/>
         </p:spPr>
         <p:txBody>
           <a:bodyPr wrap="square" rtlCol="0" anchor="ctr"/>
@@ -4240,6 +4464,7 @@
             <a:avLst/>
           </a:prstGeom>
           <a:noFill/>
+          <a:ln/>
         </p:spPr>
         <p:txBody>
           <a:bodyPr wrap="square" rtlCol="0" anchor="ctr"/>
@@ -4278,6 +4503,7 @@
             <a:avLst/>
           </a:prstGeom>
           <a:noFill/>
+          <a:ln/>
         </p:spPr>
         <p:txBody>
           <a:bodyPr wrap="square" rtlCol="0" anchor="t"/>
@@ -4383,6 +4609,7 @@
             <a:avLst/>
           </a:prstGeom>
           <a:noFill/>
+          <a:ln/>
         </p:spPr>
         <p:txBody>
           <a:bodyPr wrap="square" rtlCol="0" anchor="ctr"/>
@@ -4421,6 +4648,7 @@
             <a:avLst/>
           </a:prstGeom>
           <a:noFill/>
+          <a:ln/>
         </p:spPr>
         <p:txBody>
           <a:bodyPr wrap="square" rtlCol="0" anchor="t"/>
@@ -4526,6 +4754,7 @@
             <a:avLst/>
           </a:prstGeom>
           <a:noFill/>
+          <a:ln/>
         </p:spPr>
         <p:txBody>
           <a:bodyPr wrap="square" rtlCol="0" anchor="ctr"/>
@@ -4559,7 +4788,7 @@
 
 <file path=ppt/slides/slide14.xml><?xml version="1.0" encoding="utf-8"?>
 <p:sld xmlns:a="http://schemas.openxmlformats.org/drawingml/2006/main" xmlns:r="http://schemas.openxmlformats.org/officeDocument/2006/relationships" xmlns:p="http://schemas.openxmlformats.org/presentationml/2006/main">
-  <p:cSld>
+  <p:cSld name="Slide 14">
     <p:bg>
       <p:bgPr>
         <a:solidFill>
@@ -4601,6 +4830,7 @@
               <a:alpha val="45000"/>
             </a:srgbClr>
           </a:solidFill>
+          <a:ln/>
         </p:spPr>
       </p:sp>
       <p:sp>
@@ -4618,6 +4848,7 @@
             <a:avLst/>
           </a:prstGeom>
           <a:noFill/>
+          <a:ln/>
         </p:spPr>
         <p:txBody>
           <a:bodyPr wrap="square" rtlCol="0" anchor="ctr"/>
@@ -4662,6 +4893,7 @@
               <a:alpha val="15000"/>
             </a:srgbClr>
           </a:solidFill>
+          <a:ln/>
         </p:spPr>
       </p:sp>
       <p:sp>
@@ -4679,6 +4911,7 @@
             <a:avLst/>
           </a:prstGeom>
           <a:noFill/>
+          <a:ln/>
         </p:spPr>
         <p:txBody>
           <a:bodyPr wrap="square" rtlCol="0" anchor="ctr"/>
@@ -4717,6 +4950,7 @@
             <a:avLst/>
           </a:prstGeom>
           <a:noFill/>
+          <a:ln/>
         </p:spPr>
         <p:txBody>
           <a:bodyPr wrap="square" rtlCol="0" anchor="t"/>
@@ -4843,6 +5077,7 @@
             <a:avLst/>
           </a:prstGeom>
           <a:noFill/>
+          <a:ln/>
         </p:spPr>
         <p:txBody>
           <a:bodyPr wrap="square" rtlCol="0" anchor="ctr"/>
@@ -4876,7 +5111,7 @@
 
 <file path=ppt/slides/slide15.xml><?xml version="1.0" encoding="utf-8"?>
 <p:sld xmlns:a="http://schemas.openxmlformats.org/drawingml/2006/main" xmlns:r="http://schemas.openxmlformats.org/officeDocument/2006/relationships" xmlns:p="http://schemas.openxmlformats.org/presentationml/2006/main">
-  <p:cSld>
+  <p:cSld name="Slide 15">
     <p:bg>
       <p:bgPr>
         <a:solidFill>
@@ -4918,6 +5153,7 @@
               <a:alpha val="35000"/>
             </a:srgbClr>
           </a:solidFill>
+          <a:ln/>
         </p:spPr>
       </p:sp>
       <p:sp>
@@ -4939,6 +5175,7 @@
               <a:alpha val="45000"/>
             </a:srgbClr>
           </a:solidFill>
+          <a:ln/>
         </p:spPr>
       </p:sp>
       <p:sp>
@@ -4956,6 +5193,7 @@
             <a:avLst/>
           </a:prstGeom>
           <a:noFill/>
+          <a:ln/>
         </p:spPr>
         <p:txBody>
           <a:bodyPr wrap="square" rtlCol="0" anchor="ctr"/>
@@ -4994,6 +5232,7 @@
             <a:avLst/>
           </a:prstGeom>
           <a:noFill/>
+          <a:ln/>
         </p:spPr>
         <p:txBody>
           <a:bodyPr wrap="square" rtlCol="0" anchor="ctr"/>
@@ -5032,6 +5271,7 @@
             <a:avLst/>
           </a:prstGeom>
           <a:noFill/>
+          <a:ln/>
         </p:spPr>
         <p:txBody>
           <a:bodyPr wrap="square" rtlCol="0" anchor="ctr"/>
@@ -5070,6 +5310,7 @@
             <a:avLst/>
           </a:prstGeom>
           <a:noFill/>
+          <a:ln/>
         </p:spPr>
         <p:txBody>
           <a:bodyPr wrap="square" rtlCol="0" anchor="ctr"/>
@@ -5114,6 +5355,7 @@
               <a:alpha val="15000"/>
             </a:srgbClr>
           </a:solidFill>
+          <a:ln/>
         </p:spPr>
       </p:sp>
       <p:sp>
@@ -5131,6 +5373,7 @@
             <a:avLst/>
           </a:prstGeom>
           <a:noFill/>
+          <a:ln/>
         </p:spPr>
         <p:txBody>
           <a:bodyPr wrap="square" rtlCol="0" anchor="ctr"/>
@@ -5169,6 +5412,7 @@
             <a:avLst/>
           </a:prstGeom>
           <a:noFill/>
+          <a:ln/>
         </p:spPr>
         <p:txBody>
           <a:bodyPr wrap="square" rtlCol="0" anchor="ctr"/>
@@ -5202,7 +5446,7 @@
 
 <file path=ppt/slides/slide2.xml><?xml version="1.0" encoding="utf-8"?>
 <p:sld xmlns:a="http://schemas.openxmlformats.org/drawingml/2006/main" xmlns:r="http://schemas.openxmlformats.org/officeDocument/2006/relationships" xmlns:p="http://schemas.openxmlformats.org/presentationml/2006/main">
-  <p:cSld>
+  <p:cSld name="Slide 2">
     <p:bg>
       <p:bgPr>
         <a:solidFill>
@@ -5242,6 +5486,7 @@
           <a:solidFill>
             <a:srgbClr val="028090"/>
           </a:solidFill>
+          <a:ln/>
         </p:spPr>
       </p:sp>
       <p:sp>
@@ -5259,6 +5504,7 @@
             <a:avLst/>
           </a:prstGeom>
           <a:noFill/>
+          <a:ln/>
         </p:spPr>
         <p:txBody>
           <a:bodyPr wrap="square" rtlCol="0" anchor="ctr"/>
@@ -5301,6 +5547,7 @@
           <a:solidFill>
             <a:srgbClr val="028090"/>
           </a:solidFill>
+          <a:ln/>
         </p:spPr>
       </p:sp>
       <p:sp>
@@ -5318,6 +5565,7 @@
             <a:avLst/>
           </a:prstGeom>
           <a:noFill/>
+          <a:ln/>
         </p:spPr>
         <p:txBody>
           <a:bodyPr wrap="square" rtlCol="0" anchor="ctr"/>
@@ -5356,6 +5604,7 @@
             <a:avLst/>
           </a:prstGeom>
           <a:noFill/>
+          <a:ln/>
         </p:spPr>
         <p:txBody>
           <a:bodyPr wrap="square" rtlCol="0" anchor="t"/>
@@ -5486,6 +5735,7 @@
           <a:solidFill>
             <a:srgbClr val="F2F7F7"/>
           </a:solidFill>
+          <a:ln/>
         </p:spPr>
       </p:sp>
       <p:sp>
@@ -5503,6 +5753,7 @@
             <a:avLst/>
           </a:prstGeom>
           <a:noFill/>
+          <a:ln/>
         </p:spPr>
         <p:txBody>
           <a:bodyPr wrap="square" rtlCol="0" anchor="ctr"/>
@@ -5541,6 +5792,7 @@
             <a:avLst/>
           </a:prstGeom>
           <a:noFill/>
+          <a:ln/>
         </p:spPr>
         <p:txBody>
           <a:bodyPr wrap="square" rtlCol="0" anchor="ctr"/>
@@ -5579,6 +5831,7 @@
             <a:avLst/>
           </a:prstGeom>
           <a:noFill/>
+          <a:ln/>
         </p:spPr>
         <p:txBody>
           <a:bodyPr wrap="square" rtlCol="0" anchor="ctr"/>
@@ -5617,6 +5870,7 @@
             <a:avLst/>
           </a:prstGeom>
           <a:noFill/>
+          <a:ln/>
         </p:spPr>
         <p:txBody>
           <a:bodyPr wrap="square" rtlCol="0" anchor="ctr"/>
@@ -5655,6 +5909,7 @@
             <a:avLst/>
           </a:prstGeom>
           <a:noFill/>
+          <a:ln/>
         </p:spPr>
         <p:txBody>
           <a:bodyPr wrap="square" rtlCol="0" anchor="ctr"/>
@@ -5693,6 +5948,7 @@
             <a:avLst/>
           </a:prstGeom>
           <a:noFill/>
+          <a:ln/>
         </p:spPr>
         <p:txBody>
           <a:bodyPr wrap="square" rtlCol="0" anchor="ctr"/>
@@ -5731,6 +5987,7 @@
             <a:avLst/>
           </a:prstGeom>
           <a:noFill/>
+          <a:ln/>
         </p:spPr>
         <p:txBody>
           <a:bodyPr wrap="square" rtlCol="0" anchor="ctr"/>
@@ -5769,6 +6026,7 @@
             <a:avLst/>
           </a:prstGeom>
           <a:noFill/>
+          <a:ln/>
         </p:spPr>
         <p:txBody>
           <a:bodyPr wrap="square" rtlCol="0" anchor="t"/>
@@ -5807,6 +6065,7 @@
             <a:avLst/>
           </a:prstGeom>
           <a:noFill/>
+          <a:ln/>
         </p:spPr>
         <p:txBody>
           <a:bodyPr wrap="square" rtlCol="0" anchor="ctr"/>
@@ -5840,7 +6099,7 @@
 
 <file path=ppt/slides/slide3.xml><?xml version="1.0" encoding="utf-8"?>
 <p:sld xmlns:a="http://schemas.openxmlformats.org/drawingml/2006/main" xmlns:r="http://schemas.openxmlformats.org/officeDocument/2006/relationships" xmlns:p="http://schemas.openxmlformats.org/presentationml/2006/main">
-  <p:cSld>
+  <p:cSld name="Slide 3">
     <p:bg>
       <p:bgPr>
         <a:solidFill>
@@ -5880,6 +6139,7 @@
           <a:solidFill>
             <a:srgbClr val="028090"/>
           </a:solidFill>
+          <a:ln/>
         </p:spPr>
       </p:sp>
       <p:sp>
@@ -5897,6 +6157,7 @@
             <a:avLst/>
           </a:prstGeom>
           <a:noFill/>
+          <a:ln/>
         </p:spPr>
         <p:txBody>
           <a:bodyPr wrap="square" rtlCol="0" anchor="ctr"/>
@@ -5939,6 +6200,7 @@
           <a:solidFill>
             <a:srgbClr val="028090"/>
           </a:solidFill>
+          <a:ln/>
         </p:spPr>
       </p:sp>
       <p:sp>
@@ -5956,6 +6218,7 @@
             <a:avLst/>
           </a:prstGeom>
           <a:noFill/>
+          <a:ln/>
         </p:spPr>
         <p:txBody>
           <a:bodyPr wrap="square" rtlCol="0" anchor="ctr"/>
@@ -5998,6 +6261,7 @@
           <a:solidFill>
             <a:srgbClr val="F2F7F7"/>
           </a:solidFill>
+          <a:ln/>
         </p:spPr>
       </p:sp>
       <p:sp>
@@ -6017,6 +6281,7 @@
           <a:solidFill>
             <a:srgbClr val="028090"/>
           </a:solidFill>
+          <a:ln/>
         </p:spPr>
       </p:sp>
       <p:sp>
@@ -6034,6 +6299,7 @@
             <a:avLst/>
           </a:prstGeom>
           <a:noFill/>
+          <a:ln/>
         </p:spPr>
         <p:txBody>
           <a:bodyPr wrap="square" rtlCol="0" anchor="ctr"/>
@@ -6072,6 +6338,7 @@
             <a:avLst/>
           </a:prstGeom>
           <a:noFill/>
+          <a:ln/>
         </p:spPr>
         <p:txBody>
           <a:bodyPr wrap="square" rtlCol="0" anchor="ctr"/>
@@ -6114,6 +6381,7 @@
           <a:solidFill>
             <a:srgbClr val="F2F7F7"/>
           </a:solidFill>
+          <a:ln/>
         </p:spPr>
       </p:sp>
       <p:sp>
@@ -6133,6 +6401,7 @@
           <a:solidFill>
             <a:srgbClr val="028090"/>
           </a:solidFill>
+          <a:ln/>
         </p:spPr>
       </p:sp>
       <p:sp>
@@ -6150,6 +6419,7 @@
             <a:avLst/>
           </a:prstGeom>
           <a:noFill/>
+          <a:ln/>
         </p:spPr>
         <p:txBody>
           <a:bodyPr wrap="square" rtlCol="0" anchor="ctr"/>
@@ -6188,6 +6458,7 @@
             <a:avLst/>
           </a:prstGeom>
           <a:noFill/>
+          <a:ln/>
         </p:spPr>
         <p:txBody>
           <a:bodyPr wrap="square" rtlCol="0" anchor="ctr"/>
@@ -6230,6 +6501,7 @@
           <a:solidFill>
             <a:srgbClr val="F2F7F7"/>
           </a:solidFill>
+          <a:ln/>
         </p:spPr>
       </p:sp>
       <p:sp>
@@ -6249,6 +6521,7 @@
           <a:solidFill>
             <a:srgbClr val="028090"/>
           </a:solidFill>
+          <a:ln/>
         </p:spPr>
       </p:sp>
       <p:sp>
@@ -6266,6 +6539,7 @@
             <a:avLst/>
           </a:prstGeom>
           <a:noFill/>
+          <a:ln/>
         </p:spPr>
         <p:txBody>
           <a:bodyPr wrap="square" rtlCol="0" anchor="ctr"/>
@@ -6304,6 +6578,7 @@
             <a:avLst/>
           </a:prstGeom>
           <a:noFill/>
+          <a:ln/>
         </p:spPr>
         <p:txBody>
           <a:bodyPr wrap="square" rtlCol="0" anchor="ctr"/>
@@ -6346,6 +6621,7 @@
           <a:solidFill>
             <a:srgbClr val="F2F7F7"/>
           </a:solidFill>
+          <a:ln/>
         </p:spPr>
       </p:sp>
       <p:sp>
@@ -6365,6 +6641,7 @@
           <a:solidFill>
             <a:srgbClr val="028090"/>
           </a:solidFill>
+          <a:ln/>
         </p:spPr>
       </p:sp>
       <p:sp>
@@ -6382,6 +6659,7 @@
             <a:avLst/>
           </a:prstGeom>
           <a:noFill/>
+          <a:ln/>
         </p:spPr>
         <p:txBody>
           <a:bodyPr wrap="square" rtlCol="0" anchor="ctr"/>
@@ -6420,6 +6698,7 @@
             <a:avLst/>
           </a:prstGeom>
           <a:noFill/>
+          <a:ln/>
         </p:spPr>
         <p:txBody>
           <a:bodyPr wrap="square" rtlCol="0" anchor="ctr"/>
@@ -6458,6 +6737,7 @@
             <a:avLst/>
           </a:prstGeom>
           <a:noFill/>
+          <a:ln/>
         </p:spPr>
         <p:txBody>
           <a:bodyPr wrap="square" rtlCol="0" anchor="ctr"/>
@@ -6491,7 +6771,7 @@
 
 <file path=ppt/slides/slide4.xml><?xml version="1.0" encoding="utf-8"?>
 <p:sld xmlns:a="http://schemas.openxmlformats.org/drawingml/2006/main" xmlns:r="http://schemas.openxmlformats.org/officeDocument/2006/relationships" xmlns:p="http://schemas.openxmlformats.org/presentationml/2006/main">
-  <p:cSld>
+  <p:cSld name="Slide 4">
     <p:bg>
       <p:bgPr>
         <a:solidFill>
@@ -6531,6 +6811,7 @@
           <a:solidFill>
             <a:srgbClr val="028090"/>
           </a:solidFill>
+          <a:ln/>
         </p:spPr>
       </p:sp>
       <p:sp>
@@ -6548,6 +6829,7 @@
             <a:avLst/>
           </a:prstGeom>
           <a:noFill/>
+          <a:ln/>
         </p:spPr>
         <p:txBody>
           <a:bodyPr wrap="square" rtlCol="0" anchor="ctr"/>
@@ -6590,6 +6872,7 @@
           <a:solidFill>
             <a:srgbClr val="028090"/>
           </a:solidFill>
+          <a:ln/>
         </p:spPr>
       </p:sp>
       <p:sp>
@@ -6607,6 +6890,7 @@
             <a:avLst/>
           </a:prstGeom>
           <a:noFill/>
+          <a:ln/>
         </p:spPr>
         <p:txBody>
           <a:bodyPr wrap="square" rtlCol="0" anchor="ctr"/>
@@ -6649,6 +6933,7 @@
           <a:solidFill>
             <a:srgbClr val="F2F7F7"/>
           </a:solidFill>
+          <a:ln/>
         </p:spPr>
       </p:sp>
       <p:sp>
@@ -6666,6 +6951,7 @@
             <a:avLst/>
           </a:prstGeom>
           <a:noFill/>
+          <a:ln/>
         </p:spPr>
         <p:txBody>
           <a:bodyPr wrap="square" rtlCol="0" anchor="ctr"/>
@@ -6704,6 +6990,7 @@
             <a:avLst/>
           </a:prstGeom>
           <a:noFill/>
+          <a:ln/>
         </p:spPr>
         <p:txBody>
           <a:bodyPr wrap="square" rtlCol="0" anchor="t"/>
@@ -6780,6 +7067,7 @@
           <a:solidFill>
             <a:srgbClr val="028090"/>
           </a:solidFill>
+          <a:ln/>
         </p:spPr>
       </p:sp>
       <p:sp>
@@ -6797,6 +7085,7 @@
             <a:avLst/>
           </a:prstGeom>
           <a:noFill/>
+          <a:ln/>
         </p:spPr>
         <p:txBody>
           <a:bodyPr wrap="square" rtlCol="0" anchor="ctr"/>
@@ -6852,6 +7141,7 @@
             <a:avLst/>
           </a:prstGeom>
           <a:noFill/>
+          <a:ln/>
         </p:spPr>
         <p:txBody>
           <a:bodyPr wrap="square" rtlCol="0" anchor="t"/>
@@ -6928,6 +7218,7 @@
           <a:solidFill>
             <a:srgbClr val="00A896"/>
           </a:solidFill>
+          <a:ln/>
         </p:spPr>
       </p:sp>
       <p:sp>
@@ -6945,6 +7236,7 @@
             <a:avLst/>
           </a:prstGeom>
           <a:noFill/>
+          <a:ln/>
         </p:spPr>
         <p:txBody>
           <a:bodyPr wrap="square" rtlCol="0" anchor="ctr"/>
@@ -7000,6 +7292,7 @@
             <a:avLst/>
           </a:prstGeom>
           <a:noFill/>
+          <a:ln/>
         </p:spPr>
         <p:txBody>
           <a:bodyPr wrap="square" rtlCol="0" anchor="t"/>
@@ -7076,6 +7369,7 @@
           <a:solidFill>
             <a:srgbClr val="02C39A"/>
           </a:solidFill>
+          <a:ln/>
         </p:spPr>
       </p:sp>
       <p:sp>
@@ -7093,6 +7387,7 @@
             <a:avLst/>
           </a:prstGeom>
           <a:noFill/>
+          <a:ln/>
         </p:spPr>
         <p:txBody>
           <a:bodyPr wrap="square" rtlCol="0" anchor="ctr"/>
@@ -7148,6 +7443,7 @@
             <a:avLst/>
           </a:prstGeom>
           <a:noFill/>
+          <a:ln/>
         </p:spPr>
         <p:txBody>
           <a:bodyPr wrap="square" rtlCol="0" anchor="t"/>
@@ -7222,6 +7518,7 @@
           <a:solidFill>
             <a:srgbClr val="5C7377"/>
           </a:solidFill>
+          <a:ln/>
         </p:spPr>
       </p:sp>
       <p:sp>
@@ -7241,6 +7538,7 @@
           <a:solidFill>
             <a:srgbClr val="5C7377"/>
           </a:solidFill>
+          <a:ln/>
         </p:spPr>
       </p:sp>
       <p:sp>
@@ -7260,6 +7558,7 @@
           <a:solidFill>
             <a:srgbClr val="5C7377"/>
           </a:solidFill>
+          <a:ln/>
         </p:spPr>
       </p:sp>
       <p:sp>
@@ -7277,6 +7576,7 @@
             <a:avLst/>
           </a:prstGeom>
           <a:noFill/>
+          <a:ln/>
         </p:spPr>
         <p:txBody>
           <a:bodyPr wrap="square" rtlCol="0" anchor="ctr"/>
@@ -7315,6 +7615,7 @@
             <a:avLst/>
           </a:prstGeom>
           <a:noFill/>
+          <a:ln/>
         </p:spPr>
         <p:txBody>
           <a:bodyPr wrap="square" rtlCol="0" anchor="ctr"/>
@@ -7353,6 +7654,7 @@
             <a:avLst/>
           </a:prstGeom>
           <a:noFill/>
+          <a:ln/>
         </p:spPr>
         <p:txBody>
           <a:bodyPr wrap="square" rtlCol="0" anchor="ctr"/>
@@ -7386,7 +7688,7 @@
 
 <file path=ppt/slides/slide5.xml><?xml version="1.0" encoding="utf-8"?>
 <p:sld xmlns:a="http://schemas.openxmlformats.org/drawingml/2006/main" xmlns:r="http://schemas.openxmlformats.org/officeDocument/2006/relationships" xmlns:p="http://schemas.openxmlformats.org/presentationml/2006/main">
-  <p:cSld>
+  <p:cSld name="Slide 5">
     <p:bg>
       <p:bgPr>
         <a:solidFill>
@@ -7426,6 +7728,7 @@
           <a:solidFill>
             <a:srgbClr val="028090"/>
           </a:solidFill>
+          <a:ln/>
         </p:spPr>
       </p:sp>
       <p:sp>
@@ -7443,6 +7746,7 @@
             <a:avLst/>
           </a:prstGeom>
           <a:noFill/>
+          <a:ln/>
         </p:spPr>
         <p:txBody>
           <a:bodyPr wrap="square" rtlCol="0" anchor="ctr"/>
@@ -7485,6 +7789,7 @@
           <a:solidFill>
             <a:srgbClr val="028090"/>
           </a:solidFill>
+          <a:ln/>
         </p:spPr>
       </p:sp>
       <p:sp>
@@ -7502,6 +7807,7 @@
             <a:avLst/>
           </a:prstGeom>
           <a:noFill/>
+          <a:ln/>
         </p:spPr>
         <p:txBody>
           <a:bodyPr wrap="square" rtlCol="0" anchor="ctr"/>
@@ -7531,7 +7837,13 @@
           <p:cNvGraphicFramePr>
             <a:graphicFrameLocks noGrp="1"/>
           </p:cNvGraphicFramePr>
-          <p:nvPr/>
+          <p:nvPr>
+            <p:extLst>
+              <p:ext uri="{D42A27DB-BD31-4B8C-83A1-F6EECF244321}">
+                <p14:modId xmlns:p14="http://schemas.microsoft.com/office/powerpoint/2010/main" val="1579011935"/>
+              </p:ext>
+            </p:extLst>
+          </p:nvPr>
         </p:nvGraphicFramePr>
         <p:xfrm>
           <a:off x="640080" y="1463040"/>
@@ -7542,9 +7854,27 @@
             <a:tbl>
               <a:tblPr/>
               <a:tblGrid>
-                <a:gridCol w="1737360"/>
-                <a:gridCol w="1280160"/>
-                <a:gridCol w="7863840"/>
+                <a:gridCol w="1737360">
+                  <a:extLst>
+                    <a:ext uri="{9D8B030D-6E8A-4147-A177-3AD203B41FA5}">
+                      <a16:colId xmlns:a16="http://schemas.microsoft.com/office/drawing/2014/main" val="20000"/>
+                    </a:ext>
+                  </a:extLst>
+                </a:gridCol>
+                <a:gridCol w="1280160">
+                  <a:extLst>
+                    <a:ext uri="{9D8B030D-6E8A-4147-A177-3AD203B41FA5}">
+                      <a16:colId xmlns:a16="http://schemas.microsoft.com/office/drawing/2014/main" val="20001"/>
+                    </a:ext>
+                  </a:extLst>
+                </a:gridCol>
+                <a:gridCol w="7863840">
+                  <a:extLst>
+                    <a:ext uri="{9D8B030D-6E8A-4147-A177-3AD203B41FA5}">
+                      <a16:colId xmlns:a16="http://schemas.microsoft.com/office/drawing/2014/main" val="20002"/>
+                    </a:ext>
+                  </a:extLst>
+                </a:gridCol>
               </a:tblGrid>
               <a:tr h="621792">
                 <a:tc>
@@ -7567,9 +7897,9 @@
                         <a:t>OSI Layer</a:t>
                       </a:r>
                       <a:endParaRPr lang="en-US" sz="1300" dirty="0">
-                        <a:latin typeface="Calibri" pitchFamily="34" charset="0"/>
-                        <a:ea typeface="Calibri" pitchFamily="34" charset="0"/>
-                        <a:cs typeface="Calibri" pitchFamily="34" charset="0"/>
+                        <a:latin typeface="Calibri" charset="0"/>
+                        <a:ea typeface="Calibri" charset="0"/>
+                        <a:cs typeface="Calibri" charset="0"/>
                       </a:endParaRPr>
                     </a:p>
                   </a:txBody>
@@ -7635,9 +7965,9 @@
                         <a:t>Status</a:t>
                       </a:r>
                       <a:endParaRPr lang="en-US" sz="1300" dirty="0">
-                        <a:latin typeface="Calibri" pitchFamily="34" charset="0"/>
-                        <a:ea typeface="Calibri" pitchFamily="34" charset="0"/>
-                        <a:cs typeface="Calibri" pitchFamily="34" charset="0"/>
+                        <a:latin typeface="Calibri" charset="0"/>
+                        <a:ea typeface="Calibri" charset="0"/>
+                        <a:cs typeface="Calibri" charset="0"/>
                       </a:endParaRPr>
                     </a:p>
                   </a:txBody>
@@ -7703,9 +8033,9 @@
                         <a:t>Role in This Project</a:t>
                       </a:r>
                       <a:endParaRPr lang="en-US" sz="1300" dirty="0">
-                        <a:latin typeface="Calibri" pitchFamily="34" charset="0"/>
-                        <a:ea typeface="Calibri" pitchFamily="34" charset="0"/>
-                        <a:cs typeface="Calibri" pitchFamily="34" charset="0"/>
+                        <a:latin typeface="Calibri" charset="0"/>
+                        <a:ea typeface="Calibri" charset="0"/>
+                        <a:cs typeface="Calibri" charset="0"/>
                       </a:endParaRPr>
                     </a:p>
                   </a:txBody>
@@ -7751,6 +8081,11 @@
                     </a:solidFill>
                   </a:tcPr>
                 </a:tc>
+                <a:extLst>
+                  <a:ext uri="{0D108BD9-81ED-4DB2-BD59-A6C34878D82A}">
+                    <a16:rowId xmlns:a16="http://schemas.microsoft.com/office/drawing/2014/main" val="10000"/>
+                  </a:ext>
+                </a:extLst>
               </a:tr>
               <a:tr h="621792">
                 <a:tc>
@@ -7773,9 +8108,9 @@
                         <a:t>Physical</a:t>
                       </a:r>
                       <a:endParaRPr lang="en-US" sz="1250" dirty="0">
-                        <a:latin typeface="Calibri" pitchFamily="34" charset="0"/>
-                        <a:ea typeface="Calibri" pitchFamily="34" charset="0"/>
-                        <a:cs typeface="Calibri" pitchFamily="34" charset="0"/>
+                        <a:latin typeface="Calibri" charset="0"/>
+                        <a:ea typeface="Calibri" charset="0"/>
+                        <a:cs typeface="Calibri" charset="0"/>
                       </a:endParaRPr>
                     </a:p>
                   </a:txBody>
@@ -7841,9 +8176,9 @@
                         <a:t>Active</a:t>
                       </a:r>
                       <a:endParaRPr lang="en-US" sz="1200" dirty="0">
-                        <a:latin typeface="Calibri" pitchFamily="34" charset="0"/>
-                        <a:ea typeface="Calibri" pitchFamily="34" charset="0"/>
-                        <a:cs typeface="Calibri" pitchFamily="34" charset="0"/>
+                        <a:latin typeface="Calibri" charset="0"/>
+                        <a:ea typeface="Calibri" charset="0"/>
+                        <a:cs typeface="Calibri" charset="0"/>
                       </a:endParaRPr>
                     </a:p>
                   </a:txBody>
@@ -7909,9 +8244,9 @@
                         <a:t>2.4 GHz Wi-Fi radio inside each ESP8266 carries every ESP-NOW frame</a:t>
                       </a:r>
                       <a:endParaRPr lang="en-US" sz="1200" dirty="0">
-                        <a:latin typeface="Calibri" pitchFamily="34" charset="0"/>
-                        <a:ea typeface="Calibri" pitchFamily="34" charset="0"/>
-                        <a:cs typeface="Calibri" pitchFamily="34" charset="0"/>
+                        <a:latin typeface="Calibri" charset="0"/>
+                        <a:ea typeface="Calibri" charset="0"/>
+                        <a:cs typeface="Calibri" charset="0"/>
                       </a:endParaRPr>
                     </a:p>
                   </a:txBody>
@@ -7957,6 +8292,11 @@
                     </a:solidFill>
                   </a:tcPr>
                 </a:tc>
+                <a:extLst>
+                  <a:ext uri="{0D108BD9-81ED-4DB2-BD59-A6C34878D82A}">
+                    <a16:rowId xmlns:a16="http://schemas.microsoft.com/office/drawing/2014/main" val="10001"/>
+                  </a:ext>
+                </a:extLst>
               </a:tr>
               <a:tr h="621792">
                 <a:tc>
@@ -7979,9 +8319,9 @@
                         <a:t>Data Link</a:t>
                       </a:r>
                       <a:endParaRPr lang="en-US" sz="1250" dirty="0">
-                        <a:latin typeface="Calibri" pitchFamily="34" charset="0"/>
-                        <a:ea typeface="Calibri" pitchFamily="34" charset="0"/>
-                        <a:cs typeface="Calibri" pitchFamily="34" charset="0"/>
+                        <a:latin typeface="Calibri" charset="0"/>
+                        <a:ea typeface="Calibri" charset="0"/>
+                        <a:cs typeface="Calibri" charset="0"/>
                       </a:endParaRPr>
                     </a:p>
                   </a:txBody>
@@ -8047,9 +8387,9 @@
                         <a:t>Active</a:t>
                       </a:r>
                       <a:endParaRPr lang="en-US" sz="1200" dirty="0">
-                        <a:latin typeface="Calibri" pitchFamily="34" charset="0"/>
-                        <a:ea typeface="Calibri" pitchFamily="34" charset="0"/>
-                        <a:cs typeface="Calibri" pitchFamily="34" charset="0"/>
+                        <a:latin typeface="Calibri" charset="0"/>
+                        <a:ea typeface="Calibri" charset="0"/>
+                        <a:cs typeface="Calibri" charset="0"/>
                       </a:endParaRPr>
                     </a:p>
                   </a:txBody>
@@ -8115,9 +8455,9 @@
                         <a:t>ESP-NOW itself: MAC based addressing, no Wi-Fi association needed</a:t>
                       </a:r>
                       <a:endParaRPr lang="en-US" sz="1200" dirty="0">
-                        <a:latin typeface="Calibri" pitchFamily="34" charset="0"/>
-                        <a:ea typeface="Calibri" pitchFamily="34" charset="0"/>
-                        <a:cs typeface="Calibri" pitchFamily="34" charset="0"/>
+                        <a:latin typeface="Calibri" charset="0"/>
+                        <a:ea typeface="Calibri" charset="0"/>
+                        <a:cs typeface="Calibri" charset="0"/>
                       </a:endParaRPr>
                     </a:p>
                   </a:txBody>
@@ -8163,6 +8503,11 @@
                     </a:solidFill>
                   </a:tcPr>
                 </a:tc>
+                <a:extLst>
+                  <a:ext uri="{0D108BD9-81ED-4DB2-BD59-A6C34878D82A}">
+                    <a16:rowId xmlns:a16="http://schemas.microsoft.com/office/drawing/2014/main" val="10002"/>
+                  </a:ext>
+                </a:extLst>
               </a:tr>
               <a:tr h="621792">
                 <a:tc>
@@ -8185,9 +8530,9 @@
                         <a:t>Network</a:t>
                       </a:r>
                       <a:endParaRPr lang="en-US" sz="1250" dirty="0">
-                        <a:latin typeface="Calibri" pitchFamily="34" charset="0"/>
-                        <a:ea typeface="Calibri" pitchFamily="34" charset="0"/>
-                        <a:cs typeface="Calibri" pitchFamily="34" charset="0"/>
+                        <a:latin typeface="Calibri" charset="0"/>
+                        <a:ea typeface="Calibri" charset="0"/>
+                        <a:cs typeface="Calibri" charset="0"/>
                       </a:endParaRPr>
                     </a:p>
                   </a:txBody>
@@ -8253,9 +8598,9 @@
                         <a:t>Skipped</a:t>
                       </a:r>
                       <a:endParaRPr lang="en-US" sz="1200" dirty="0">
-                        <a:latin typeface="Calibri" pitchFamily="34" charset="0"/>
-                        <a:ea typeface="Calibri" pitchFamily="34" charset="0"/>
-                        <a:cs typeface="Calibri" pitchFamily="34" charset="0"/>
+                        <a:latin typeface="Calibri" charset="0"/>
+                        <a:ea typeface="Calibri" charset="0"/>
+                        <a:cs typeface="Calibri" charset="0"/>
                       </a:endParaRPr>
                     </a:p>
                   </a:txBody>
@@ -8321,9 +8666,9 @@
                         <a:t>No IP address is ever assigned, no routing decision takes place</a:t>
                       </a:r>
                       <a:endParaRPr lang="en-US" sz="1200" dirty="0">
-                        <a:latin typeface="Calibri" pitchFamily="34" charset="0"/>
-                        <a:ea typeface="Calibri" pitchFamily="34" charset="0"/>
-                        <a:cs typeface="Calibri" pitchFamily="34" charset="0"/>
+                        <a:latin typeface="Calibri" charset="0"/>
+                        <a:ea typeface="Calibri" charset="0"/>
+                        <a:cs typeface="Calibri" charset="0"/>
                       </a:endParaRPr>
                     </a:p>
                   </a:txBody>
@@ -8369,6 +8714,11 @@
                     </a:solidFill>
                   </a:tcPr>
                 </a:tc>
+                <a:extLst>
+                  <a:ext uri="{0D108BD9-81ED-4DB2-BD59-A6C34878D82A}">
+                    <a16:rowId xmlns:a16="http://schemas.microsoft.com/office/drawing/2014/main" val="10003"/>
+                  </a:ext>
+                </a:extLst>
               </a:tr>
               <a:tr h="621792">
                 <a:tc>
@@ -8391,9 +8741,9 @@
                         <a:t>Transport</a:t>
                       </a:r>
                       <a:endParaRPr lang="en-US" sz="1250" dirty="0">
-                        <a:latin typeface="Calibri" pitchFamily="34" charset="0"/>
-                        <a:ea typeface="Calibri" pitchFamily="34" charset="0"/>
-                        <a:cs typeface="Calibri" pitchFamily="34" charset="0"/>
+                        <a:latin typeface="Calibri" charset="0"/>
+                        <a:ea typeface="Calibri" charset="0"/>
+                        <a:cs typeface="Calibri" charset="0"/>
                       </a:endParaRPr>
                     </a:p>
                   </a:txBody>
@@ -8459,9 +8809,9 @@
                         <a:t>Skipped</a:t>
                       </a:r>
                       <a:endParaRPr lang="en-US" sz="1200" dirty="0">
-                        <a:latin typeface="Calibri" pitchFamily="34" charset="0"/>
-                        <a:ea typeface="Calibri" pitchFamily="34" charset="0"/>
-                        <a:cs typeface="Calibri" pitchFamily="34" charset="0"/>
+                        <a:latin typeface="Calibri" charset="0"/>
+                        <a:ea typeface="Calibri" charset="0"/>
+                        <a:cs typeface="Calibri" charset="0"/>
                       </a:endParaRPr>
                     </a:p>
                   </a:txBody>
@@ -8527,9 +8877,9 @@
                         <a:t>No TCP or UDP; the send callback is a data link level acknowledgment</a:t>
                       </a:r>
                       <a:endParaRPr lang="en-US" sz="1200" dirty="0">
-                        <a:latin typeface="Calibri" pitchFamily="34" charset="0"/>
-                        <a:ea typeface="Calibri" pitchFamily="34" charset="0"/>
-                        <a:cs typeface="Calibri" pitchFamily="34" charset="0"/>
+                        <a:latin typeface="Calibri" charset="0"/>
+                        <a:ea typeface="Calibri" charset="0"/>
+                        <a:cs typeface="Calibri" charset="0"/>
                       </a:endParaRPr>
                     </a:p>
                   </a:txBody>
@@ -8575,6 +8925,11 @@
                     </a:solidFill>
                   </a:tcPr>
                 </a:tc>
+                <a:extLst>
+                  <a:ext uri="{0D108BD9-81ED-4DB2-BD59-A6C34878D82A}">
+                    <a16:rowId xmlns:a16="http://schemas.microsoft.com/office/drawing/2014/main" val="10004"/>
+                  </a:ext>
+                </a:extLst>
               </a:tr>
               <a:tr h="621792">
                 <a:tc>
@@ -8597,9 +8952,9 @@
                         <a:t>Session</a:t>
                       </a:r>
                       <a:endParaRPr lang="en-US" sz="1250" dirty="0">
-                        <a:latin typeface="Calibri" pitchFamily="34" charset="0"/>
-                        <a:ea typeface="Calibri" pitchFamily="34" charset="0"/>
-                        <a:cs typeface="Calibri" pitchFamily="34" charset="0"/>
+                        <a:latin typeface="Calibri" charset="0"/>
+                        <a:ea typeface="Calibri" charset="0"/>
+                        <a:cs typeface="Calibri" charset="0"/>
                       </a:endParaRPr>
                     </a:p>
                   </a:txBody>
@@ -8665,9 +9020,9 @@
                         <a:t>Skipped</a:t>
                       </a:r>
                       <a:endParaRPr lang="en-US" sz="1200" dirty="0">
-                        <a:latin typeface="Calibri" pitchFamily="34" charset="0"/>
-                        <a:ea typeface="Calibri" pitchFamily="34" charset="0"/>
-                        <a:cs typeface="Calibri" pitchFamily="34" charset="0"/>
+                        <a:latin typeface="Calibri" charset="0"/>
+                        <a:ea typeface="Calibri" charset="0"/>
+                        <a:cs typeface="Calibri" charset="0"/>
                       </a:endParaRPr>
                     </a:p>
                   </a:txBody>
@@ -8733,9 +9088,9 @@
                         <a:t>Connectionless design, no session state kept between transmissions</a:t>
                       </a:r>
                       <a:endParaRPr lang="en-US" sz="1200" dirty="0">
-                        <a:latin typeface="Calibri" pitchFamily="34" charset="0"/>
-                        <a:ea typeface="Calibri" pitchFamily="34" charset="0"/>
-                        <a:cs typeface="Calibri" pitchFamily="34" charset="0"/>
+                        <a:latin typeface="Calibri" charset="0"/>
+                        <a:ea typeface="Calibri" charset="0"/>
+                        <a:cs typeface="Calibri" charset="0"/>
                       </a:endParaRPr>
                     </a:p>
                   </a:txBody>
@@ -8781,6 +9136,11 @@
                     </a:solidFill>
                   </a:tcPr>
                 </a:tc>
+                <a:extLst>
+                  <a:ext uri="{0D108BD9-81ED-4DB2-BD59-A6C34878D82A}">
+                    <a16:rowId xmlns:a16="http://schemas.microsoft.com/office/drawing/2014/main" val="10005"/>
+                  </a:ext>
+                </a:extLst>
               </a:tr>
               <a:tr h="621792">
                 <a:tc>
@@ -8803,9 +9163,9 @@
                         <a:t>Presentation</a:t>
                       </a:r>
                       <a:endParaRPr lang="en-US" sz="1250" dirty="0">
-                        <a:latin typeface="Calibri" pitchFamily="34" charset="0"/>
-                        <a:ea typeface="Calibri" pitchFamily="34" charset="0"/>
-                        <a:cs typeface="Calibri" pitchFamily="34" charset="0"/>
+                        <a:latin typeface="Calibri" charset="0"/>
+                        <a:ea typeface="Calibri" charset="0"/>
+                        <a:cs typeface="Calibri" charset="0"/>
                       </a:endParaRPr>
                     </a:p>
                   </a:txBody>
@@ -8871,9 +9231,9 @@
                         <a:t>Active</a:t>
                       </a:r>
                       <a:endParaRPr lang="en-US" sz="1200" dirty="0">
-                        <a:latin typeface="Calibri" pitchFamily="34" charset="0"/>
-                        <a:ea typeface="Calibri" pitchFamily="34" charset="0"/>
-                        <a:cs typeface="Calibri" pitchFamily="34" charset="0"/>
+                        <a:latin typeface="Calibri" charset="0"/>
+                        <a:ea typeface="Calibri" charset="0"/>
+                        <a:cs typeface="Calibri" charset="0"/>
                       </a:endParaRPr>
                     </a:p>
                   </a:txBody>
@@ -8939,9 +9299,9 @@
                         <a:t>Shared struct_message format, identical on both boards</a:t>
                       </a:r>
                       <a:endParaRPr lang="en-US" sz="1200" dirty="0">
-                        <a:latin typeface="Calibri" pitchFamily="34" charset="0"/>
-                        <a:ea typeface="Calibri" pitchFamily="34" charset="0"/>
-                        <a:cs typeface="Calibri" pitchFamily="34" charset="0"/>
+                        <a:latin typeface="Calibri" charset="0"/>
+                        <a:ea typeface="Calibri" charset="0"/>
+                        <a:cs typeface="Calibri" charset="0"/>
                       </a:endParaRPr>
                     </a:p>
                   </a:txBody>
@@ -8987,6 +9347,11 @@
                     </a:solidFill>
                   </a:tcPr>
                 </a:tc>
+                <a:extLst>
+                  <a:ext uri="{0D108BD9-81ED-4DB2-BD59-A6C34878D82A}">
+                    <a16:rowId xmlns:a16="http://schemas.microsoft.com/office/drawing/2014/main" val="10006"/>
+                  </a:ext>
+                </a:extLst>
               </a:tr>
               <a:tr h="621792">
                 <a:tc>
@@ -9009,9 +9374,9 @@
                         <a:t>Application</a:t>
                       </a:r>
                       <a:endParaRPr lang="en-US" sz="1250" dirty="0">
-                        <a:latin typeface="Calibri" pitchFamily="34" charset="0"/>
-                        <a:ea typeface="Calibri" pitchFamily="34" charset="0"/>
-                        <a:cs typeface="Calibri" pitchFamily="34" charset="0"/>
+                        <a:latin typeface="Calibri" charset="0"/>
+                        <a:ea typeface="Calibri" charset="0"/>
+                        <a:cs typeface="Calibri" charset="0"/>
                       </a:endParaRPr>
                     </a:p>
                   </a:txBody>
@@ -9077,9 +9442,9 @@
                         <a:t>Active</a:t>
                       </a:r>
                       <a:endParaRPr lang="en-US" sz="1200" dirty="0">
-                        <a:latin typeface="Calibri" pitchFamily="34" charset="0"/>
-                        <a:ea typeface="Calibri" pitchFamily="34" charset="0"/>
-                        <a:cs typeface="Calibri" pitchFamily="34" charset="0"/>
+                        <a:latin typeface="Calibri" charset="0"/>
+                        <a:ea typeface="Calibri" charset="0"/>
+                        <a:cs typeface="Calibri" charset="0"/>
                       </a:endParaRPr>
                     </a:p>
                   </a:txBody>
@@ -9145,9 +9510,9 @@
                         <a:t>Sensor fusion, confirmation timer, cooldown, LED logic, LittleFS log</a:t>
                       </a:r>
                       <a:endParaRPr lang="en-US" sz="1200" dirty="0">
-                        <a:latin typeface="Calibri" pitchFamily="34" charset="0"/>
-                        <a:ea typeface="Calibri" pitchFamily="34" charset="0"/>
-                        <a:cs typeface="Calibri" pitchFamily="34" charset="0"/>
+                        <a:latin typeface="Calibri" charset="0"/>
+                        <a:ea typeface="Calibri" charset="0"/>
+                        <a:cs typeface="Calibri" charset="0"/>
                       </a:endParaRPr>
                     </a:p>
                   </a:txBody>
@@ -9193,6 +9558,11 @@
                     </a:solidFill>
                   </a:tcPr>
                 </a:tc>
+                <a:extLst>
+                  <a:ext uri="{0D108BD9-81ED-4DB2-BD59-A6C34878D82A}">
+                    <a16:rowId xmlns:a16="http://schemas.microsoft.com/office/drawing/2014/main" val="10007"/>
+                  </a:ext>
+                </a:extLst>
               </a:tr>
             </a:tbl>
           </a:graphicData>
@@ -9213,6 +9583,7 @@
             <a:avLst/>
           </a:prstGeom>
           <a:noFill/>
+          <a:ln/>
         </p:spPr>
         <p:txBody>
           <a:bodyPr wrap="square" rtlCol="0" anchor="ctr"/>
@@ -9246,7 +9617,7 @@
 
 <file path=ppt/slides/slide6.xml><?xml version="1.0" encoding="utf-8"?>
 <p:sld xmlns:a="http://schemas.openxmlformats.org/drawingml/2006/main" xmlns:r="http://schemas.openxmlformats.org/officeDocument/2006/relationships" xmlns:p="http://schemas.openxmlformats.org/presentationml/2006/main">
-  <p:cSld>
+  <p:cSld name="Slide 6">
     <p:bg>
       <p:bgPr>
         <a:solidFill>
@@ -9286,6 +9657,7 @@
           <a:solidFill>
             <a:srgbClr val="028090"/>
           </a:solidFill>
+          <a:ln/>
         </p:spPr>
       </p:sp>
       <p:sp>
@@ -9303,6 +9675,7 @@
             <a:avLst/>
           </a:prstGeom>
           <a:noFill/>
+          <a:ln/>
         </p:spPr>
         <p:txBody>
           <a:bodyPr wrap="square" rtlCol="0" anchor="ctr"/>
@@ -9345,6 +9718,7 @@
           <a:solidFill>
             <a:srgbClr val="028090"/>
           </a:solidFill>
+          <a:ln/>
         </p:spPr>
       </p:sp>
       <p:sp>
@@ -9362,6 +9736,7 @@
             <a:avLst/>
           </a:prstGeom>
           <a:noFill/>
+          <a:ln/>
         </p:spPr>
         <p:txBody>
           <a:bodyPr wrap="square" rtlCol="0" anchor="ctr"/>
@@ -9400,6 +9775,7 @@
             <a:avLst/>
           </a:prstGeom>
           <a:noFill/>
+          <a:ln/>
         </p:spPr>
         <p:txBody>
           <a:bodyPr wrap="square" rtlCol="0" anchor="t"/>
@@ -9496,7 +9872,13 @@
           <p:cNvGraphicFramePr>
             <a:graphicFrameLocks noGrp="1"/>
           </p:cNvGraphicFramePr>
-          <p:nvPr/>
+          <p:nvPr>
+            <p:extLst>
+              <p:ext uri="{D42A27DB-BD31-4B8C-83A1-F6EECF244321}">
+                <p14:modId xmlns:p14="http://schemas.microsoft.com/office/powerpoint/2010/main" val="1579011935"/>
+              </p:ext>
+            </p:extLst>
+          </p:nvPr>
         </p:nvGraphicFramePr>
         <p:xfrm>
           <a:off x="640080" y="3429000"/>
@@ -9507,8 +9889,20 @@
             <a:tbl>
               <a:tblPr/>
               <a:tblGrid>
-                <a:gridCol w="3108960"/>
-                <a:gridCol w="7772400"/>
+                <a:gridCol w="3108960">
+                  <a:extLst>
+                    <a:ext uri="{9D8B030D-6E8A-4147-A177-3AD203B41FA5}">
+                      <a16:colId xmlns:a16="http://schemas.microsoft.com/office/drawing/2014/main" val="20000"/>
+                    </a:ext>
+                  </a:extLst>
+                </a:gridCol>
+                <a:gridCol w="7772400">
+                  <a:extLst>
+                    <a:ext uri="{9D8B030D-6E8A-4147-A177-3AD203B41FA5}">
+                      <a16:colId xmlns:a16="http://schemas.microsoft.com/office/drawing/2014/main" val="20001"/>
+                    </a:ext>
+                  </a:extLst>
+                </a:gridCol>
               </a:tblGrid>
               <a:tr h="530352">
                 <a:tc>
@@ -9531,9 +9925,9 @@
                         <a:t>Alternative Protocol</a:t>
                       </a:r>
                       <a:endParaRPr lang="en-US" sz="1300" dirty="0">
-                        <a:latin typeface="Calibri" pitchFamily="34" charset="0"/>
-                        <a:ea typeface="Calibri" pitchFamily="34" charset="0"/>
-                        <a:cs typeface="Calibri" pitchFamily="34" charset="0"/>
+                        <a:latin typeface="Calibri" charset="0"/>
+                        <a:ea typeface="Calibri" charset="0"/>
+                        <a:cs typeface="Calibri" charset="0"/>
                       </a:endParaRPr>
                     </a:p>
                   </a:txBody>
@@ -9599,9 +9993,9 @@
                         <a:t>Reason Not Selected</a:t>
                       </a:r>
                       <a:endParaRPr lang="en-US" sz="1300" dirty="0">
-                        <a:latin typeface="Calibri" pitchFamily="34" charset="0"/>
-                        <a:ea typeface="Calibri" pitchFamily="34" charset="0"/>
-                        <a:cs typeface="Calibri" pitchFamily="34" charset="0"/>
+                        <a:latin typeface="Calibri" charset="0"/>
+                        <a:ea typeface="Calibri" charset="0"/>
+                        <a:cs typeface="Calibri" charset="0"/>
                       </a:endParaRPr>
                     </a:p>
                   </a:txBody>
@@ -9647,6 +10041,11 @@
                     </a:solidFill>
                   </a:tcPr>
                 </a:tc>
+                <a:extLst>
+                  <a:ext uri="{0D108BD9-81ED-4DB2-BD59-A6C34878D82A}">
+                    <a16:rowId xmlns:a16="http://schemas.microsoft.com/office/drawing/2014/main" val="10000"/>
+                  </a:ext>
+                </a:extLst>
               </a:tr>
               <a:tr h="530352">
                 <a:tc>
@@ -9669,9 +10068,9 @@
                         <a:t>Bluetooth Low Energy</a:t>
                       </a:r>
                       <a:endParaRPr lang="en-US" sz="1250" dirty="0">
-                        <a:latin typeface="Calibri" pitchFamily="34" charset="0"/>
-                        <a:ea typeface="Calibri" pitchFamily="34" charset="0"/>
-                        <a:cs typeface="Calibri" pitchFamily="34" charset="0"/>
+                        <a:latin typeface="Calibri" charset="0"/>
+                        <a:ea typeface="Calibri" charset="0"/>
+                        <a:cs typeface="Calibri" charset="0"/>
                       </a:endParaRPr>
                     </a:p>
                   </a:txBody>
@@ -9737,9 +10136,9 @@
                         <a:t>Needs pairing and bonding, shorter range than ESP-NOW</a:t>
                       </a:r>
                       <a:endParaRPr lang="en-US" sz="1250" dirty="0">
-                        <a:latin typeface="Calibri" pitchFamily="34" charset="0"/>
-                        <a:ea typeface="Calibri" pitchFamily="34" charset="0"/>
-                        <a:cs typeface="Calibri" pitchFamily="34" charset="0"/>
+                        <a:latin typeface="Calibri" charset="0"/>
+                        <a:ea typeface="Calibri" charset="0"/>
+                        <a:cs typeface="Calibri" charset="0"/>
                       </a:endParaRPr>
                     </a:p>
                   </a:txBody>
@@ -9785,6 +10184,11 @@
                     </a:solidFill>
                   </a:tcPr>
                 </a:tc>
+                <a:extLst>
+                  <a:ext uri="{0D108BD9-81ED-4DB2-BD59-A6C34878D82A}">
+                    <a16:rowId xmlns:a16="http://schemas.microsoft.com/office/drawing/2014/main" val="10001"/>
+                  </a:ext>
+                </a:extLst>
               </a:tr>
               <a:tr h="530352">
                 <a:tc>
@@ -9807,9 +10211,9 @@
                         <a:t>Standard Wi-Fi + TCP/IP</a:t>
                       </a:r>
                       <a:endParaRPr lang="en-US" sz="1250" dirty="0">
-                        <a:latin typeface="Calibri" pitchFamily="34" charset="0"/>
-                        <a:ea typeface="Calibri" pitchFamily="34" charset="0"/>
-                        <a:cs typeface="Calibri" pitchFamily="34" charset="0"/>
+                        <a:latin typeface="Calibri" charset="0"/>
+                        <a:ea typeface="Calibri" charset="0"/>
+                        <a:cs typeface="Calibri" charset="0"/>
                       </a:endParaRPr>
                     </a:p>
                   </a:txBody>
@@ -9875,9 +10279,9 @@
                         <a:t>Brings back the router and internet dependency this project avoids</a:t>
                       </a:r>
                       <a:endParaRPr lang="en-US" sz="1250" dirty="0">
-                        <a:latin typeface="Calibri" pitchFamily="34" charset="0"/>
-                        <a:ea typeface="Calibri" pitchFamily="34" charset="0"/>
-                        <a:cs typeface="Calibri" pitchFamily="34" charset="0"/>
+                        <a:latin typeface="Calibri" charset="0"/>
+                        <a:ea typeface="Calibri" charset="0"/>
+                        <a:cs typeface="Calibri" charset="0"/>
                       </a:endParaRPr>
                     </a:p>
                   </a:txBody>
@@ -9923,6 +10327,11 @@
                     </a:solidFill>
                   </a:tcPr>
                 </a:tc>
+                <a:extLst>
+                  <a:ext uri="{0D108BD9-81ED-4DB2-BD59-A6C34878D82A}">
+                    <a16:rowId xmlns:a16="http://schemas.microsoft.com/office/drawing/2014/main" val="10002"/>
+                  </a:ext>
+                </a:extLst>
               </a:tr>
               <a:tr h="530352">
                 <a:tc>
@@ -9945,9 +10354,9 @@
                         <a:t>Zigbee</a:t>
                       </a:r>
                       <a:endParaRPr lang="en-US" sz="1250" dirty="0">
-                        <a:latin typeface="Calibri" pitchFamily="34" charset="0"/>
-                        <a:ea typeface="Calibri" pitchFamily="34" charset="0"/>
-                        <a:cs typeface="Calibri" pitchFamily="34" charset="0"/>
+                        <a:latin typeface="Calibri" charset="0"/>
+                        <a:ea typeface="Calibri" charset="0"/>
+                        <a:cs typeface="Calibri" charset="0"/>
                       </a:endParaRPr>
                     </a:p>
                   </a:txBody>
@@ -10013,9 +10422,9 @@
                         <a:t>No native radio on ESP8266, needs an extra costly module</a:t>
                       </a:r>
                       <a:endParaRPr lang="en-US" sz="1250" dirty="0">
-                        <a:latin typeface="Calibri" pitchFamily="34" charset="0"/>
-                        <a:ea typeface="Calibri" pitchFamily="34" charset="0"/>
-                        <a:cs typeface="Calibri" pitchFamily="34" charset="0"/>
+                        <a:latin typeface="Calibri" charset="0"/>
+                        <a:ea typeface="Calibri" charset="0"/>
+                        <a:cs typeface="Calibri" charset="0"/>
                       </a:endParaRPr>
                     </a:p>
                   </a:txBody>
@@ -10061,6 +10470,11 @@
                     </a:solidFill>
                   </a:tcPr>
                 </a:tc>
+                <a:extLst>
+                  <a:ext uri="{0D108BD9-81ED-4DB2-BD59-A6C34878D82A}">
+                    <a16:rowId xmlns:a16="http://schemas.microsoft.com/office/drawing/2014/main" val="10003"/>
+                  </a:ext>
+                </a:extLst>
               </a:tr>
               <a:tr h="530352">
                 <a:tc>
@@ -10083,9 +10497,9 @@
                         <a:t>LoRa</a:t>
                       </a:r>
                       <a:endParaRPr lang="en-US" sz="1250" dirty="0">
-                        <a:latin typeface="Calibri" pitchFamily="34" charset="0"/>
-                        <a:ea typeface="Calibri" pitchFamily="34" charset="0"/>
-                        <a:cs typeface="Calibri" pitchFamily="34" charset="0"/>
+                        <a:latin typeface="Calibri" charset="0"/>
+                        <a:ea typeface="Calibri" charset="0"/>
+                        <a:cs typeface="Calibri" charset="0"/>
                       </a:endParaRPr>
                     </a:p>
                   </a:txBody>
@@ -10151,9 +10565,9 @@
                         <a:t>Too complex and low bandwidth for a short range, indoor, two node link</a:t>
                       </a:r>
                       <a:endParaRPr lang="en-US" sz="1250" dirty="0">
-                        <a:latin typeface="Calibri" pitchFamily="34" charset="0"/>
-                        <a:ea typeface="Calibri" pitchFamily="34" charset="0"/>
-                        <a:cs typeface="Calibri" pitchFamily="34" charset="0"/>
+                        <a:latin typeface="Calibri" charset="0"/>
+                        <a:ea typeface="Calibri" charset="0"/>
+                        <a:cs typeface="Calibri" charset="0"/>
                       </a:endParaRPr>
                     </a:p>
                   </a:txBody>
@@ -10199,6 +10613,11 @@
                     </a:solidFill>
                   </a:tcPr>
                 </a:tc>
+                <a:extLst>
+                  <a:ext uri="{0D108BD9-81ED-4DB2-BD59-A6C34878D82A}">
+                    <a16:rowId xmlns:a16="http://schemas.microsoft.com/office/drawing/2014/main" val="10004"/>
+                  </a:ext>
+                </a:extLst>
               </a:tr>
               <a:tr h="530352">
                 <a:tc>
@@ -10221,9 +10640,9 @@
                         <a:t>ESP-MESH</a:t>
                       </a:r>
                       <a:endParaRPr lang="en-US" sz="1250" dirty="0">
-                        <a:latin typeface="Calibri" pitchFamily="34" charset="0"/>
-                        <a:ea typeface="Calibri" pitchFamily="34" charset="0"/>
-                        <a:cs typeface="Calibri" pitchFamily="34" charset="0"/>
+                        <a:latin typeface="Calibri" charset="0"/>
+                        <a:ea typeface="Calibri" charset="0"/>
+                        <a:cs typeface="Calibri" charset="0"/>
                       </a:endParaRPr>
                     </a:p>
                   </a:txBody>
@@ -10289,9 +10708,9 @@
                         <a:t>Built for many nodes; unnecessary for a fixed two node system, noted as future work</a:t>
                       </a:r>
                       <a:endParaRPr lang="en-US" sz="1250" dirty="0">
-                        <a:latin typeface="Calibri" pitchFamily="34" charset="0"/>
-                        <a:ea typeface="Calibri" pitchFamily="34" charset="0"/>
-                        <a:cs typeface="Calibri" pitchFamily="34" charset="0"/>
+                        <a:latin typeface="Calibri" charset="0"/>
+                        <a:ea typeface="Calibri" charset="0"/>
+                        <a:cs typeface="Calibri" charset="0"/>
                       </a:endParaRPr>
                     </a:p>
                   </a:txBody>
@@ -10337,6 +10756,11 @@
                     </a:solidFill>
                   </a:tcPr>
                 </a:tc>
+                <a:extLst>
+                  <a:ext uri="{0D108BD9-81ED-4DB2-BD59-A6C34878D82A}">
+                    <a16:rowId xmlns:a16="http://schemas.microsoft.com/office/drawing/2014/main" val="10005"/>
+                  </a:ext>
+                </a:extLst>
               </a:tr>
             </a:tbl>
           </a:graphicData>
@@ -10357,6 +10781,7 @@
             <a:avLst/>
           </a:prstGeom>
           <a:noFill/>
+          <a:ln/>
         </p:spPr>
         <p:txBody>
           <a:bodyPr wrap="square" rtlCol="0" anchor="ctr"/>
@@ -10390,7 +10815,7 @@
 
 <file path=ppt/slides/slide7.xml><?xml version="1.0" encoding="utf-8"?>
 <p:sld xmlns:a="http://schemas.openxmlformats.org/drawingml/2006/main" xmlns:r="http://schemas.openxmlformats.org/officeDocument/2006/relationships" xmlns:p="http://schemas.openxmlformats.org/presentationml/2006/main">
-  <p:cSld>
+  <p:cSld name="Slide 7">
     <p:bg>
       <p:bgPr>
         <a:solidFill>
@@ -10430,6 +10855,7 @@
           <a:solidFill>
             <a:srgbClr val="028090"/>
           </a:solidFill>
+          <a:ln/>
         </p:spPr>
       </p:sp>
       <p:sp>
@@ -10447,6 +10873,7 @@
             <a:avLst/>
           </a:prstGeom>
           <a:noFill/>
+          <a:ln/>
         </p:spPr>
         <p:txBody>
           <a:bodyPr wrap="square" rtlCol="0" anchor="ctr"/>
@@ -10489,6 +10916,7 @@
           <a:solidFill>
             <a:srgbClr val="028090"/>
           </a:solidFill>
+          <a:ln/>
         </p:spPr>
       </p:sp>
       <p:sp>
@@ -10506,6 +10934,7 @@
             <a:avLst/>
           </a:prstGeom>
           <a:noFill/>
+          <a:ln/>
         </p:spPr>
         <p:txBody>
           <a:bodyPr wrap="square" rtlCol="0" anchor="ctr"/>
@@ -10535,7 +10964,13 @@
           <p:cNvGraphicFramePr>
             <a:graphicFrameLocks noGrp="1"/>
           </p:cNvGraphicFramePr>
-          <p:nvPr/>
+          <p:nvPr>
+            <p:extLst>
+              <p:ext uri="{D42A27DB-BD31-4B8C-83A1-F6EECF244321}">
+                <p14:modId xmlns:p14="http://schemas.microsoft.com/office/powerpoint/2010/main" val="1579011935"/>
+              </p:ext>
+            </p:extLst>
+          </p:nvPr>
         </p:nvGraphicFramePr>
         <p:xfrm>
           <a:off x="640080" y="1554480"/>
@@ -10546,9 +10981,27 @@
             <a:tbl>
               <a:tblPr/>
               <a:tblGrid>
-                <a:gridCol w="3291840"/>
-                <a:gridCol w="914400"/>
-                <a:gridCol w="6675120"/>
+                <a:gridCol w="3291840">
+                  <a:extLst>
+                    <a:ext uri="{9D8B030D-6E8A-4147-A177-3AD203B41FA5}">
+                      <a16:colId xmlns:a16="http://schemas.microsoft.com/office/drawing/2014/main" val="20000"/>
+                    </a:ext>
+                  </a:extLst>
+                </a:gridCol>
+                <a:gridCol w="914400">
+                  <a:extLst>
+                    <a:ext uri="{9D8B030D-6E8A-4147-A177-3AD203B41FA5}">
+                      <a16:colId xmlns:a16="http://schemas.microsoft.com/office/drawing/2014/main" val="20001"/>
+                    </a:ext>
+                  </a:extLst>
+                </a:gridCol>
+                <a:gridCol w="6675120">
+                  <a:extLst>
+                    <a:ext uri="{9D8B030D-6E8A-4147-A177-3AD203B41FA5}">
+                      <a16:colId xmlns:a16="http://schemas.microsoft.com/office/drawing/2014/main" val="20002"/>
+                    </a:ext>
+                  </a:extLst>
+                </a:gridCol>
               </a:tblGrid>
               <a:tr h="640080">
                 <a:tc>
@@ -10571,9 +11024,9 @@
                         <a:t>Component</a:t>
                       </a:r>
                       <a:endParaRPr lang="en-US" sz="1400" dirty="0">
-                        <a:latin typeface="Calibri" pitchFamily="34" charset="0"/>
-                        <a:ea typeface="Calibri" pitchFamily="34" charset="0"/>
-                        <a:cs typeface="Calibri" pitchFamily="34" charset="0"/>
+                        <a:latin typeface="Calibri" charset="0"/>
+                        <a:ea typeface="Calibri" charset="0"/>
+                        <a:cs typeface="Calibri" charset="0"/>
                       </a:endParaRPr>
                     </a:p>
                   </a:txBody>
@@ -10639,9 +11092,9 @@
                         <a:t>Qty</a:t>
                       </a:r>
                       <a:endParaRPr lang="en-US" sz="1400" dirty="0">
-                        <a:latin typeface="Calibri" pitchFamily="34" charset="0"/>
-                        <a:ea typeface="Calibri" pitchFamily="34" charset="0"/>
-                        <a:cs typeface="Calibri" pitchFamily="34" charset="0"/>
+                        <a:latin typeface="Calibri" charset="0"/>
+                        <a:ea typeface="Calibri" charset="0"/>
+                        <a:cs typeface="Calibri" charset="0"/>
                       </a:endParaRPr>
                     </a:p>
                   </a:txBody>
@@ -10707,9 +11160,9 @@
                         <a:t>Purpose</a:t>
                       </a:r>
                       <a:endParaRPr lang="en-US" sz="1400" dirty="0">
-                        <a:latin typeface="Calibri" pitchFamily="34" charset="0"/>
-                        <a:ea typeface="Calibri" pitchFamily="34" charset="0"/>
-                        <a:cs typeface="Calibri" pitchFamily="34" charset="0"/>
+                        <a:latin typeface="Calibri" charset="0"/>
+                        <a:ea typeface="Calibri" charset="0"/>
+                        <a:cs typeface="Calibri" charset="0"/>
                       </a:endParaRPr>
                     </a:p>
                   </a:txBody>
@@ -10755,6 +11208,11 @@
                     </a:solidFill>
                   </a:tcPr>
                 </a:tc>
+                <a:extLst>
+                  <a:ext uri="{0D108BD9-81ED-4DB2-BD59-A6C34878D82A}">
+                    <a16:rowId xmlns:a16="http://schemas.microsoft.com/office/drawing/2014/main" val="10000"/>
+                  </a:ext>
+                </a:extLst>
               </a:tr>
               <a:tr h="640080">
                 <a:tc>
@@ -10777,9 +11235,9 @@
                         <a:t>NodeMCU ESP8266</a:t>
                       </a:r>
                       <a:endParaRPr lang="en-US" sz="1300" dirty="0">
-                        <a:latin typeface="Calibri" pitchFamily="34" charset="0"/>
-                        <a:ea typeface="Calibri" pitchFamily="34" charset="0"/>
-                        <a:cs typeface="Calibri" pitchFamily="34" charset="0"/>
+                        <a:latin typeface="Calibri" charset="0"/>
+                        <a:ea typeface="Calibri" charset="0"/>
+                        <a:cs typeface="Calibri" charset="0"/>
                       </a:endParaRPr>
                     </a:p>
                   </a:txBody>
@@ -10845,9 +11303,9 @@
                         <a:t>2</a:t>
                       </a:r>
                       <a:endParaRPr lang="en-US" sz="1300" dirty="0">
-                        <a:latin typeface="Calibri" pitchFamily="34" charset="0"/>
-                        <a:ea typeface="Calibri" pitchFamily="34" charset="0"/>
-                        <a:cs typeface="Calibri" pitchFamily="34" charset="0"/>
+                        <a:latin typeface="Calibri" charset="0"/>
+                        <a:ea typeface="Calibri" charset="0"/>
+                        <a:cs typeface="Calibri" charset="0"/>
                       </a:endParaRPr>
                     </a:p>
                   </a:txBody>
@@ -10913,9 +11371,9 @@
                         <a:t>Main controller board with built in Wi-Fi radio</a:t>
                       </a:r>
                       <a:endParaRPr lang="en-US" sz="1250" dirty="0">
-                        <a:latin typeface="Calibri" pitchFamily="34" charset="0"/>
-                        <a:ea typeface="Calibri" pitchFamily="34" charset="0"/>
-                        <a:cs typeface="Calibri" pitchFamily="34" charset="0"/>
+                        <a:latin typeface="Calibri" charset="0"/>
+                        <a:ea typeface="Calibri" charset="0"/>
+                        <a:cs typeface="Calibri" charset="0"/>
                       </a:endParaRPr>
                     </a:p>
                   </a:txBody>
@@ -10961,6 +11419,11 @@
                     </a:solidFill>
                   </a:tcPr>
                 </a:tc>
+                <a:extLst>
+                  <a:ext uri="{0D108BD9-81ED-4DB2-BD59-A6C34878D82A}">
+                    <a16:rowId xmlns:a16="http://schemas.microsoft.com/office/drawing/2014/main" val="10001"/>
+                  </a:ext>
+                </a:extLst>
               </a:tr>
               <a:tr h="640080">
                 <a:tc>
@@ -10983,9 +11446,9 @@
                         <a:t>HC-SR04 Ultrasonic Sensor</a:t>
                       </a:r>
                       <a:endParaRPr lang="en-US" sz="1300" dirty="0">
-                        <a:latin typeface="Calibri" pitchFamily="34" charset="0"/>
-                        <a:ea typeface="Calibri" pitchFamily="34" charset="0"/>
-                        <a:cs typeface="Calibri" pitchFamily="34" charset="0"/>
+                        <a:latin typeface="Calibri" charset="0"/>
+                        <a:ea typeface="Calibri" charset="0"/>
+                        <a:cs typeface="Calibri" charset="0"/>
                       </a:endParaRPr>
                     </a:p>
                   </a:txBody>
@@ -11051,9 +11514,9 @@
                         <a:t>1</a:t>
                       </a:r>
                       <a:endParaRPr lang="en-US" sz="1300" dirty="0">
-                        <a:latin typeface="Calibri" pitchFamily="34" charset="0"/>
-                        <a:ea typeface="Calibri" pitchFamily="34" charset="0"/>
-                        <a:cs typeface="Calibri" pitchFamily="34" charset="0"/>
+                        <a:latin typeface="Calibri" charset="0"/>
+                        <a:ea typeface="Calibri" charset="0"/>
+                        <a:cs typeface="Calibri" charset="0"/>
                       </a:endParaRPr>
                     </a:p>
                   </a:txBody>
@@ -11119,9 +11582,9 @@
                         <a:t>Measures distance using sound wave reflection</a:t>
                       </a:r>
                       <a:endParaRPr lang="en-US" sz="1250" dirty="0">
-                        <a:latin typeface="Calibri" pitchFamily="34" charset="0"/>
-                        <a:ea typeface="Calibri" pitchFamily="34" charset="0"/>
-                        <a:cs typeface="Calibri" pitchFamily="34" charset="0"/>
+                        <a:latin typeface="Calibri" charset="0"/>
+                        <a:ea typeface="Calibri" charset="0"/>
+                        <a:cs typeface="Calibri" charset="0"/>
                       </a:endParaRPr>
                     </a:p>
                   </a:txBody>
@@ -11167,6 +11630,11 @@
                     </a:solidFill>
                   </a:tcPr>
                 </a:tc>
+                <a:extLst>
+                  <a:ext uri="{0D108BD9-81ED-4DB2-BD59-A6C34878D82A}">
+                    <a16:rowId xmlns:a16="http://schemas.microsoft.com/office/drawing/2014/main" val="10002"/>
+                  </a:ext>
+                </a:extLst>
               </a:tr>
               <a:tr h="640080">
                 <a:tc>
@@ -11189,9 +11657,9 @@
                         <a:t>SR505 PIR Motion Sensor</a:t>
                       </a:r>
                       <a:endParaRPr lang="en-US" sz="1300" dirty="0">
-                        <a:latin typeface="Calibri" pitchFamily="34" charset="0"/>
-                        <a:ea typeface="Calibri" pitchFamily="34" charset="0"/>
-                        <a:cs typeface="Calibri" pitchFamily="34" charset="0"/>
+                        <a:latin typeface="Calibri" charset="0"/>
+                        <a:ea typeface="Calibri" charset="0"/>
+                        <a:cs typeface="Calibri" charset="0"/>
                       </a:endParaRPr>
                     </a:p>
                   </a:txBody>
@@ -11257,9 +11725,9 @@
                         <a:t>1</a:t>
                       </a:r>
                       <a:endParaRPr lang="en-US" sz="1300" dirty="0">
-                        <a:latin typeface="Calibri" pitchFamily="34" charset="0"/>
-                        <a:ea typeface="Calibri" pitchFamily="34" charset="0"/>
-                        <a:cs typeface="Calibri" pitchFamily="34" charset="0"/>
+                        <a:latin typeface="Calibri" charset="0"/>
+                        <a:ea typeface="Calibri" charset="0"/>
+                        <a:cs typeface="Calibri" charset="0"/>
                       </a:endParaRPr>
                     </a:p>
                   </a:txBody>
@@ -11325,9 +11793,9 @@
                         <a:t>Detects movement of a nearby warm body</a:t>
                       </a:r>
                       <a:endParaRPr lang="en-US" sz="1250" dirty="0">
-                        <a:latin typeface="Calibri" pitchFamily="34" charset="0"/>
-                        <a:ea typeface="Calibri" pitchFamily="34" charset="0"/>
-                        <a:cs typeface="Calibri" pitchFamily="34" charset="0"/>
+                        <a:latin typeface="Calibri" charset="0"/>
+                        <a:ea typeface="Calibri" charset="0"/>
+                        <a:cs typeface="Calibri" charset="0"/>
                       </a:endParaRPr>
                     </a:p>
                   </a:txBody>
@@ -11373,6 +11841,11 @@
                     </a:solidFill>
                   </a:tcPr>
                 </a:tc>
+                <a:extLst>
+                  <a:ext uri="{0D108BD9-81ED-4DB2-BD59-A6C34878D82A}">
+                    <a16:rowId xmlns:a16="http://schemas.microsoft.com/office/drawing/2014/main" val="10003"/>
+                  </a:ext>
+                </a:extLst>
               </a:tr>
               <a:tr h="640080">
                 <a:tc>
@@ -11395,9 +11868,9 @@
                         <a:t>LEDs (Red, Yellow, Green)</a:t>
                       </a:r>
                       <a:endParaRPr lang="en-US" sz="1300" dirty="0">
-                        <a:latin typeface="Calibri" pitchFamily="34" charset="0"/>
-                        <a:ea typeface="Calibri" pitchFamily="34" charset="0"/>
-                        <a:cs typeface="Calibri" pitchFamily="34" charset="0"/>
+                        <a:latin typeface="Calibri" charset="0"/>
+                        <a:ea typeface="Calibri" charset="0"/>
+                        <a:cs typeface="Calibri" charset="0"/>
                       </a:endParaRPr>
                     </a:p>
                   </a:txBody>
@@ -11463,9 +11936,9 @@
                         <a:t>5</a:t>
                       </a:r>
                       <a:endParaRPr lang="en-US" sz="1300" dirty="0">
-                        <a:latin typeface="Calibri" pitchFamily="34" charset="0"/>
-                        <a:ea typeface="Calibri" pitchFamily="34" charset="0"/>
-                        <a:cs typeface="Calibri" pitchFamily="34" charset="0"/>
+                        <a:latin typeface="Calibri" charset="0"/>
+                        <a:ea typeface="Calibri" charset="0"/>
+                        <a:cs typeface="Calibri" charset="0"/>
                       </a:endParaRPr>
                     </a:p>
                   </a:txBody>
@@ -11531,9 +12004,9 @@
                         <a:t>Show sensor and detection status visually</a:t>
                       </a:r>
                       <a:endParaRPr lang="en-US" sz="1250" dirty="0">
-                        <a:latin typeface="Calibri" pitchFamily="34" charset="0"/>
-                        <a:ea typeface="Calibri" pitchFamily="34" charset="0"/>
-                        <a:cs typeface="Calibri" pitchFamily="34" charset="0"/>
+                        <a:latin typeface="Calibri" charset="0"/>
+                        <a:ea typeface="Calibri" charset="0"/>
+                        <a:cs typeface="Calibri" charset="0"/>
                       </a:endParaRPr>
                     </a:p>
                   </a:txBody>
@@ -11579,6 +12052,11 @@
                     </a:solidFill>
                   </a:tcPr>
                 </a:tc>
+                <a:extLst>
+                  <a:ext uri="{0D108BD9-81ED-4DB2-BD59-A6C34878D82A}">
+                    <a16:rowId xmlns:a16="http://schemas.microsoft.com/office/drawing/2014/main" val="10004"/>
+                  </a:ext>
+                </a:extLst>
               </a:tr>
               <a:tr h="640080">
                 <a:tc>
@@ -11601,9 +12079,9 @@
                         <a:t>Resistors (220Ω)</a:t>
                       </a:r>
                       <a:endParaRPr lang="en-US" sz="1300" dirty="0">
-                        <a:latin typeface="Calibri" pitchFamily="34" charset="0"/>
-                        <a:ea typeface="Calibri" pitchFamily="34" charset="0"/>
-                        <a:cs typeface="Calibri" pitchFamily="34" charset="0"/>
+                        <a:latin typeface="Calibri" charset="0"/>
+                        <a:ea typeface="Calibri" charset="0"/>
+                        <a:cs typeface="Calibri" charset="0"/>
                       </a:endParaRPr>
                     </a:p>
                   </a:txBody>
@@ -11669,9 +12147,9 @@
                         <a:t>5</a:t>
                       </a:r>
                       <a:endParaRPr lang="en-US" sz="1300" dirty="0">
-                        <a:latin typeface="Calibri" pitchFamily="34" charset="0"/>
-                        <a:ea typeface="Calibri" pitchFamily="34" charset="0"/>
-                        <a:cs typeface="Calibri" pitchFamily="34" charset="0"/>
+                        <a:latin typeface="Calibri" charset="0"/>
+                        <a:ea typeface="Calibri" charset="0"/>
+                        <a:cs typeface="Calibri" charset="0"/>
                       </a:endParaRPr>
                     </a:p>
                   </a:txBody>
@@ -11737,9 +12215,9 @@
                         <a:t>Protect each LED from overcurrent</a:t>
                       </a:r>
                       <a:endParaRPr lang="en-US" sz="1250" dirty="0">
-                        <a:latin typeface="Calibri" pitchFamily="34" charset="0"/>
-                        <a:ea typeface="Calibri" pitchFamily="34" charset="0"/>
-                        <a:cs typeface="Calibri" pitchFamily="34" charset="0"/>
+                        <a:latin typeface="Calibri" charset="0"/>
+                        <a:ea typeface="Calibri" charset="0"/>
+                        <a:cs typeface="Calibri" charset="0"/>
                       </a:endParaRPr>
                     </a:p>
                   </a:txBody>
@@ -11785,6 +12263,11 @@
                     </a:solidFill>
                   </a:tcPr>
                 </a:tc>
+                <a:extLst>
+                  <a:ext uri="{0D108BD9-81ED-4DB2-BD59-A6C34878D82A}">
+                    <a16:rowId xmlns:a16="http://schemas.microsoft.com/office/drawing/2014/main" val="10005"/>
+                  </a:ext>
+                </a:extLst>
               </a:tr>
               <a:tr h="640080">
                 <a:tc>
@@ -11807,9 +12290,9 @@
                         <a:t>Breadboard, Jumper Wires, USB Cable</a:t>
                       </a:r>
                       <a:endParaRPr lang="en-US" sz="1300" dirty="0">
-                        <a:latin typeface="Calibri" pitchFamily="34" charset="0"/>
-                        <a:ea typeface="Calibri" pitchFamily="34" charset="0"/>
-                        <a:cs typeface="Calibri" pitchFamily="34" charset="0"/>
+                        <a:latin typeface="Calibri" charset="0"/>
+                        <a:ea typeface="Calibri" charset="0"/>
+                        <a:cs typeface="Calibri" charset="0"/>
                       </a:endParaRPr>
                     </a:p>
                   </a:txBody>
@@ -11875,9 +12358,9 @@
                         <a:t>-</a:t>
                       </a:r>
                       <a:endParaRPr lang="en-US" sz="1300" dirty="0">
-                        <a:latin typeface="Calibri" pitchFamily="34" charset="0"/>
-                        <a:ea typeface="Calibri" pitchFamily="34" charset="0"/>
-                        <a:cs typeface="Calibri" pitchFamily="34" charset="0"/>
+                        <a:latin typeface="Calibri" charset="0"/>
+                        <a:ea typeface="Calibri" charset="0"/>
+                        <a:cs typeface="Calibri" charset="0"/>
                       </a:endParaRPr>
                     </a:p>
                   </a:txBody>
@@ -11943,9 +12426,9 @@
                         <a:t>Wiring, mounting and power for both boards</a:t>
                       </a:r>
                       <a:endParaRPr lang="en-US" sz="1250" dirty="0">
-                        <a:latin typeface="Calibri" pitchFamily="34" charset="0"/>
-                        <a:ea typeface="Calibri" pitchFamily="34" charset="0"/>
-                        <a:cs typeface="Calibri" pitchFamily="34" charset="0"/>
+                        <a:latin typeface="Calibri" charset="0"/>
+                        <a:ea typeface="Calibri" charset="0"/>
+                        <a:cs typeface="Calibri" charset="0"/>
                       </a:endParaRPr>
                     </a:p>
                   </a:txBody>
@@ -11991,6 +12474,11 @@
                     </a:solidFill>
                   </a:tcPr>
                 </a:tc>
+                <a:extLst>
+                  <a:ext uri="{0D108BD9-81ED-4DB2-BD59-A6C34878D82A}">
+                    <a16:rowId xmlns:a16="http://schemas.microsoft.com/office/drawing/2014/main" val="10006"/>
+                  </a:ext>
+                </a:extLst>
               </a:tr>
             </a:tbl>
           </a:graphicData>
@@ -12011,6 +12499,7 @@
             <a:avLst/>
           </a:prstGeom>
           <a:noFill/>
+          <a:ln/>
         </p:spPr>
         <p:txBody>
           <a:bodyPr wrap="square" rtlCol="0" anchor="ctr"/>
@@ -12044,7 +12533,7 @@
 
 <file path=ppt/slides/slide8.xml><?xml version="1.0" encoding="utf-8"?>
 <p:sld xmlns:a="http://schemas.openxmlformats.org/drawingml/2006/main" xmlns:r="http://schemas.openxmlformats.org/officeDocument/2006/relationships" xmlns:p="http://schemas.openxmlformats.org/presentationml/2006/main">
-  <p:cSld>
+  <p:cSld name="Slide 8">
     <p:bg>
       <p:bgPr>
         <a:solidFill>
@@ -12084,6 +12573,7 @@
           <a:solidFill>
             <a:srgbClr val="028090"/>
           </a:solidFill>
+          <a:ln/>
         </p:spPr>
       </p:sp>
       <p:sp>
@@ -12101,6 +12591,7 @@
             <a:avLst/>
           </a:prstGeom>
           <a:noFill/>
+          <a:ln/>
         </p:spPr>
         <p:txBody>
           <a:bodyPr wrap="square" rtlCol="0" anchor="ctr"/>
@@ -12143,6 +12634,7 @@
           <a:solidFill>
             <a:srgbClr val="028090"/>
           </a:solidFill>
+          <a:ln/>
         </p:spPr>
       </p:sp>
       <p:sp>
@@ -12160,6 +12652,7 @@
             <a:avLst/>
           </a:prstGeom>
           <a:noFill/>
+          <a:ln/>
         </p:spPr>
         <p:txBody>
           <a:bodyPr wrap="square" rtlCol="0" anchor="ctr"/>
@@ -12202,6 +12695,7 @@
           <a:solidFill>
             <a:srgbClr val="028090"/>
           </a:solidFill>
+          <a:ln/>
         </p:spPr>
       </p:sp>
       <p:sp>
@@ -12221,6 +12715,7 @@
           <a:solidFill>
             <a:srgbClr val="FFFFFF"/>
           </a:solidFill>
+          <a:ln/>
         </p:spPr>
       </p:sp>
       <p:sp>
@@ -12238,6 +12733,7 @@
             <a:avLst/>
           </a:prstGeom>
           <a:noFill/>
+          <a:ln/>
         </p:spPr>
         <p:txBody>
           <a:bodyPr wrap="square" rtlCol="0" anchor="ctr"/>
@@ -12278,6 +12774,7 @@
           <a:solidFill>
             <a:srgbClr val="FFFFFF"/>
           </a:solidFill>
+          <a:ln/>
         </p:spPr>
       </p:sp>
       <p:sp>
@@ -12295,6 +12792,7 @@
             <a:avLst/>
           </a:prstGeom>
           <a:noFill/>
+          <a:ln/>
         </p:spPr>
         <p:txBody>
           <a:bodyPr wrap="square" rtlCol="0" anchor="ctr"/>
@@ -12333,6 +12831,7 @@
             <a:avLst/>
           </a:prstGeom>
           <a:noFill/>
+          <a:ln/>
         </p:spPr>
         <p:txBody>
           <a:bodyPr wrap="square" rtlCol="0" anchor="ctr"/>
@@ -12371,6 +12870,7 @@
             <a:avLst/>
           </a:prstGeom>
           <a:noFill/>
+          <a:ln/>
         </p:spPr>
         <p:txBody>
           <a:bodyPr wrap="square" rtlCol="0" anchor="ctr"/>
@@ -12413,6 +12913,7 @@
           <a:solidFill>
             <a:srgbClr val="00A896"/>
           </a:solidFill>
+          <a:ln/>
         </p:spPr>
       </p:sp>
       <p:sp>
@@ -12432,6 +12933,7 @@
           <a:solidFill>
             <a:srgbClr val="FFFFFF"/>
           </a:solidFill>
+          <a:ln/>
         </p:spPr>
       </p:sp>
       <p:sp>
@@ -12449,6 +12951,7 @@
             <a:avLst/>
           </a:prstGeom>
           <a:noFill/>
+          <a:ln/>
         </p:spPr>
         <p:txBody>
           <a:bodyPr wrap="square" rtlCol="0" anchor="ctr"/>
@@ -12489,6 +12992,7 @@
           <a:solidFill>
             <a:srgbClr val="FFFFFF"/>
           </a:solidFill>
+          <a:ln/>
         </p:spPr>
       </p:sp>
       <p:sp>
@@ -12506,6 +13010,7 @@
             <a:avLst/>
           </a:prstGeom>
           <a:noFill/>
+          <a:ln/>
         </p:spPr>
         <p:txBody>
           <a:bodyPr wrap="square" rtlCol="0" anchor="ctr"/>
@@ -12544,6 +13049,7 @@
             <a:avLst/>
           </a:prstGeom>
           <a:noFill/>
+          <a:ln/>
         </p:spPr>
         <p:txBody>
           <a:bodyPr wrap="square" rtlCol="0" anchor="ctr"/>
@@ -12582,6 +13088,7 @@
             <a:avLst/>
           </a:prstGeom>
           <a:noFill/>
+          <a:ln/>
         </p:spPr>
         <p:txBody>
           <a:bodyPr wrap="square" rtlCol="0" anchor="ctr"/>
@@ -12624,6 +13131,7 @@
           <a:solidFill>
             <a:srgbClr val="028090"/>
           </a:solidFill>
+          <a:ln/>
         </p:spPr>
       </p:sp>
       <p:sp>
@@ -12643,6 +13151,7 @@
           <a:solidFill>
             <a:srgbClr val="FFFFFF"/>
           </a:solidFill>
+          <a:ln/>
         </p:spPr>
       </p:sp>
       <p:sp>
@@ -12660,6 +13169,7 @@
             <a:avLst/>
           </a:prstGeom>
           <a:noFill/>
+          <a:ln/>
         </p:spPr>
         <p:txBody>
           <a:bodyPr wrap="square" rtlCol="0" anchor="ctr"/>
@@ -12700,6 +13210,7 @@
           <a:solidFill>
             <a:srgbClr val="FFFFFF"/>
           </a:solidFill>
+          <a:ln/>
         </p:spPr>
       </p:sp>
       <p:sp>
@@ -12717,6 +13228,7 @@
             <a:avLst/>
           </a:prstGeom>
           <a:noFill/>
+          <a:ln/>
         </p:spPr>
         <p:txBody>
           <a:bodyPr wrap="square" rtlCol="0" anchor="ctr"/>
@@ -12755,6 +13267,7 @@
             <a:avLst/>
           </a:prstGeom>
           <a:noFill/>
+          <a:ln/>
         </p:spPr>
         <p:txBody>
           <a:bodyPr wrap="square" rtlCol="0" anchor="ctr"/>
@@ -12793,6 +13306,7 @@
             <a:avLst/>
           </a:prstGeom>
           <a:noFill/>
+          <a:ln/>
         </p:spPr>
         <p:txBody>
           <a:bodyPr wrap="square" rtlCol="0" anchor="ctr"/>
@@ -12835,6 +13349,7 @@
           <a:solidFill>
             <a:srgbClr val="00A896"/>
           </a:solidFill>
+          <a:ln/>
         </p:spPr>
       </p:sp>
       <p:sp>
@@ -12854,6 +13369,7 @@
           <a:solidFill>
             <a:srgbClr val="FFFFFF"/>
           </a:solidFill>
+          <a:ln/>
         </p:spPr>
       </p:sp>
       <p:sp>
@@ -12871,6 +13387,7 @@
             <a:avLst/>
           </a:prstGeom>
           <a:noFill/>
+          <a:ln/>
         </p:spPr>
         <p:txBody>
           <a:bodyPr wrap="square" rtlCol="0" anchor="ctr"/>
@@ -12911,6 +13428,7 @@
           <a:solidFill>
             <a:srgbClr val="FFFFFF"/>
           </a:solidFill>
+          <a:ln/>
         </p:spPr>
       </p:sp>
       <p:sp>
@@ -12928,6 +13446,7 @@
             <a:avLst/>
           </a:prstGeom>
           <a:noFill/>
+          <a:ln/>
         </p:spPr>
         <p:txBody>
           <a:bodyPr wrap="square" rtlCol="0" anchor="ctr"/>
@@ -12966,6 +13485,7 @@
             <a:avLst/>
           </a:prstGeom>
           <a:noFill/>
+          <a:ln/>
         </p:spPr>
         <p:txBody>
           <a:bodyPr wrap="square" rtlCol="0" anchor="ctr"/>
@@ -13004,6 +13524,7 @@
             <a:avLst/>
           </a:prstGeom>
           <a:noFill/>
+          <a:ln/>
         </p:spPr>
         <p:txBody>
           <a:bodyPr wrap="square" rtlCol="0" anchor="ctr"/>
@@ -13042,6 +13563,7 @@
             <a:avLst/>
           </a:prstGeom>
           <a:noFill/>
+          <a:ln/>
         </p:spPr>
         <p:txBody>
           <a:bodyPr wrap="square" rtlCol="0" anchor="ctr"/>
@@ -13075,7 +13597,7 @@
 
 <file path=ppt/slides/slide9.xml><?xml version="1.0" encoding="utf-8"?>
 <p:sld xmlns:a="http://schemas.openxmlformats.org/drawingml/2006/main" xmlns:r="http://schemas.openxmlformats.org/officeDocument/2006/relationships" xmlns:p="http://schemas.openxmlformats.org/presentationml/2006/main">
-  <p:cSld>
+  <p:cSld name="Slide 9">
     <p:bg>
       <p:bgPr>
         <a:solidFill>
@@ -13115,6 +13637,7 @@
           <a:solidFill>
             <a:srgbClr val="028090"/>
           </a:solidFill>
+          <a:ln/>
         </p:spPr>
       </p:sp>
       <p:sp>
@@ -13132,6 +13655,7 @@
             <a:avLst/>
           </a:prstGeom>
           <a:noFill/>
+          <a:ln/>
         </p:spPr>
         <p:txBody>
           <a:bodyPr wrap="square" rtlCol="0" anchor="ctr"/>
@@ -13174,6 +13698,7 @@
           <a:solidFill>
             <a:srgbClr val="028090"/>
           </a:solidFill>
+          <a:ln/>
         </p:spPr>
       </p:sp>
       <p:sp>
@@ -13191,6 +13716,7 @@
             <a:avLst/>
           </a:prstGeom>
           <a:noFill/>
+          <a:ln/>
         </p:spPr>
         <p:txBody>
           <a:bodyPr wrap="square" rtlCol="0" anchor="ctr"/>
@@ -13229,6 +13755,7 @@
             <a:avLst/>
           </a:prstGeom>
           <a:noFill/>
+          <a:ln/>
         </p:spPr>
         <p:txBody>
           <a:bodyPr wrap="square" rtlCol="0" anchor="ctr"/>
@@ -13271,6 +13798,7 @@
           <a:solidFill>
             <a:srgbClr val="F2F7F7"/>
           </a:solidFill>
+          <a:ln/>
         </p:spPr>
       </p:sp>
       <p:sp>
@@ -13290,6 +13818,7 @@
           <a:solidFill>
             <a:srgbClr val="028090"/>
           </a:solidFill>
+          <a:ln/>
         </p:spPr>
       </p:sp>
       <p:sp>
@@ -13307,6 +13836,7 @@
             <a:avLst/>
           </a:prstGeom>
           <a:noFill/>
+          <a:ln/>
         </p:spPr>
         <p:txBody>
           <a:bodyPr wrap="square" rtlCol="0" anchor="ctr"/>
@@ -13345,6 +13875,7 @@
             <a:avLst/>
           </a:prstGeom>
           <a:noFill/>
+          <a:ln/>
         </p:spPr>
         <p:txBody>
           <a:bodyPr wrap="square" rtlCol="0" anchor="ctr"/>
@@ -13387,6 +13918,7 @@
           <a:solidFill>
             <a:srgbClr val="F2F7F7"/>
           </a:solidFill>
+          <a:ln/>
         </p:spPr>
       </p:sp>
       <p:sp>
@@ -13406,6 +13938,7 @@
           <a:solidFill>
             <a:srgbClr val="028090"/>
           </a:solidFill>
+          <a:ln/>
         </p:spPr>
       </p:sp>
       <p:sp>
@@ -13423,6 +13956,7 @@
             <a:avLst/>
           </a:prstGeom>
           <a:noFill/>
+          <a:ln/>
         </p:spPr>
         <p:txBody>
           <a:bodyPr wrap="square" rtlCol="0" anchor="ctr"/>
@@ -13461,6 +13995,7 @@
             <a:avLst/>
           </a:prstGeom>
           <a:noFill/>
+          <a:ln/>
         </p:spPr>
         <p:txBody>
           <a:bodyPr wrap="square" rtlCol="0" anchor="ctr"/>
@@ -13503,6 +14038,7 @@
           <a:solidFill>
             <a:srgbClr val="F2F7F7"/>
           </a:solidFill>
+          <a:ln/>
         </p:spPr>
       </p:sp>
       <p:sp>
@@ -13522,6 +14058,7 @@
           <a:solidFill>
             <a:srgbClr val="028090"/>
           </a:solidFill>
+          <a:ln/>
         </p:spPr>
       </p:sp>
       <p:sp>
@@ -13539,6 +14076,7 @@
             <a:avLst/>
           </a:prstGeom>
           <a:noFill/>
+          <a:ln/>
         </p:spPr>
         <p:txBody>
           <a:bodyPr wrap="square" rtlCol="0" anchor="ctr"/>
@@ -13577,6 +14115,7 @@
             <a:avLst/>
           </a:prstGeom>
           <a:noFill/>
+          <a:ln/>
         </p:spPr>
         <p:txBody>
           <a:bodyPr wrap="square" rtlCol="0" anchor="ctr"/>
@@ -13619,6 +14158,7 @@
           <a:solidFill>
             <a:srgbClr val="F2F7F7"/>
           </a:solidFill>
+          <a:ln/>
         </p:spPr>
       </p:sp>
       <p:sp>
@@ -13638,6 +14178,7 @@
           <a:solidFill>
             <a:srgbClr val="028090"/>
           </a:solidFill>
+          <a:ln/>
         </p:spPr>
       </p:sp>
       <p:sp>
@@ -13655,6 +14196,7 @@
             <a:avLst/>
           </a:prstGeom>
           <a:noFill/>
+          <a:ln/>
         </p:spPr>
         <p:txBody>
           <a:bodyPr wrap="square" rtlCol="0" anchor="ctr"/>
@@ -13693,6 +14235,7 @@
             <a:avLst/>
           </a:prstGeom>
           <a:noFill/>
+          <a:ln/>
         </p:spPr>
         <p:txBody>
           <a:bodyPr wrap="square" rtlCol="0" anchor="ctr"/>
@@ -13735,6 +14278,7 @@
           <a:solidFill>
             <a:srgbClr val="F2F7F7"/>
           </a:solidFill>
+          <a:ln/>
         </p:spPr>
       </p:sp>
       <p:sp>
@@ -13754,6 +14298,7 @@
           <a:solidFill>
             <a:srgbClr val="028090"/>
           </a:solidFill>
+          <a:ln/>
         </p:spPr>
       </p:sp>
       <p:sp>
@@ -13771,6 +14316,7 @@
             <a:avLst/>
           </a:prstGeom>
           <a:noFill/>
+          <a:ln/>
         </p:spPr>
         <p:txBody>
           <a:bodyPr wrap="square" rtlCol="0" anchor="ctr"/>
@@ -13809,6 +14355,7 @@
             <a:avLst/>
           </a:prstGeom>
           <a:noFill/>
+          <a:ln/>
         </p:spPr>
         <p:txBody>
           <a:bodyPr wrap="square" rtlCol="0" anchor="ctr"/>
@@ -13847,6 +14394,7 @@
             <a:avLst/>
           </a:prstGeom>
           <a:noFill/>
+          <a:ln/>
         </p:spPr>
         <p:txBody>
           <a:bodyPr wrap="square" rtlCol="0" anchor="ctr"/>
@@ -13889,6 +14437,7 @@
           <a:solidFill>
             <a:srgbClr val="F2F7F7"/>
           </a:solidFill>
+          <a:ln/>
         </p:spPr>
       </p:sp>
       <p:sp>
@@ -13908,6 +14457,7 @@
           <a:solidFill>
             <a:srgbClr val="00A896"/>
           </a:solidFill>
+          <a:ln/>
         </p:spPr>
       </p:sp>
       <p:sp>
@@ -13925,6 +14475,7 @@
             <a:avLst/>
           </a:prstGeom>
           <a:noFill/>
+          <a:ln/>
         </p:spPr>
         <p:txBody>
           <a:bodyPr wrap="square" rtlCol="0" anchor="ctr"/>
@@ -13963,6 +14514,7 @@
             <a:avLst/>
           </a:prstGeom>
           <a:noFill/>
+          <a:ln/>
         </p:spPr>
         <p:txBody>
           <a:bodyPr wrap="square" rtlCol="0" anchor="ctr"/>
@@ -14005,6 +14557,7 @@
           <a:solidFill>
             <a:srgbClr val="F2F7F7"/>
           </a:solidFill>
+          <a:ln/>
         </p:spPr>
       </p:sp>
       <p:sp>
@@ -14024,6 +14577,7 @@
           <a:solidFill>
             <a:srgbClr val="00A896"/>
           </a:solidFill>
+          <a:ln/>
         </p:spPr>
       </p:sp>
       <p:sp>
@@ -14041,6 +14595,7 @@
             <a:avLst/>
           </a:prstGeom>
           <a:noFill/>
+          <a:ln/>
         </p:spPr>
         <p:txBody>
           <a:bodyPr wrap="square" rtlCol="0" anchor="ctr"/>
@@ -14079,6 +14634,7 @@
             <a:avLst/>
           </a:prstGeom>
           <a:noFill/>
+          <a:ln/>
         </p:spPr>
         <p:txBody>
           <a:bodyPr wrap="square" rtlCol="0" anchor="ctr"/>
@@ -14121,6 +14677,7 @@
           <a:solidFill>
             <a:srgbClr val="F2F7F7"/>
           </a:solidFill>
+          <a:ln/>
         </p:spPr>
       </p:sp>
       <p:sp>
@@ -14140,6 +14697,7 @@
           <a:solidFill>
             <a:srgbClr val="00A896"/>
           </a:solidFill>
+          <a:ln/>
         </p:spPr>
       </p:sp>
       <p:sp>
@@ -14157,6 +14715,7 @@
             <a:avLst/>
           </a:prstGeom>
           <a:noFill/>
+          <a:ln/>
         </p:spPr>
         <p:txBody>
           <a:bodyPr wrap="square" rtlCol="0" anchor="ctr"/>
@@ -14195,6 +14754,7 @@
             <a:avLst/>
           </a:prstGeom>
           <a:noFill/>
+          <a:ln/>
         </p:spPr>
         <p:txBody>
           <a:bodyPr wrap="square" rtlCol="0" anchor="ctr"/>
@@ -14237,6 +14797,7 @@
           <a:solidFill>
             <a:srgbClr val="F2F7F7"/>
           </a:solidFill>
+          <a:ln/>
         </p:spPr>
       </p:sp>
       <p:sp>
@@ -14256,6 +14817,7 @@
           <a:solidFill>
             <a:srgbClr val="00A896"/>
           </a:solidFill>
+          <a:ln/>
         </p:spPr>
       </p:sp>
       <p:sp>
@@ -14273,6 +14835,7 @@
             <a:avLst/>
           </a:prstGeom>
           <a:noFill/>
+          <a:ln/>
         </p:spPr>
         <p:txBody>
           <a:bodyPr wrap="square" rtlCol="0" anchor="ctr"/>
@@ -14311,6 +14874,7 @@
             <a:avLst/>
           </a:prstGeom>
           <a:noFill/>
+          <a:ln/>
         </p:spPr>
         <p:txBody>
           <a:bodyPr wrap="square" rtlCol="0" anchor="ctr"/>
@@ -14353,6 +14917,7 @@
           <a:solidFill>
             <a:srgbClr val="F2F7F7"/>
           </a:solidFill>
+          <a:ln/>
         </p:spPr>
       </p:sp>
       <p:sp>
@@ -14372,6 +14937,7 @@
           <a:solidFill>
             <a:srgbClr val="00A896"/>
           </a:solidFill>
+          <a:ln/>
         </p:spPr>
       </p:sp>
       <p:sp>
@@ -14389,6 +14955,7 @@
             <a:avLst/>
           </a:prstGeom>
           <a:noFill/>
+          <a:ln/>
         </p:spPr>
         <p:txBody>
           <a:bodyPr wrap="square" rtlCol="0" anchor="ctr"/>
@@ -14427,6 +14994,7 @@
             <a:avLst/>
           </a:prstGeom>
           <a:noFill/>
+          <a:ln/>
         </p:spPr>
         <p:txBody>
           <a:bodyPr wrap="square" rtlCol="0" anchor="ctr"/>
@@ -14465,6 +15033,7 @@
             <a:avLst/>
           </a:prstGeom>
           <a:noFill/>
+          <a:ln/>
         </p:spPr>
         <p:txBody>
           <a:bodyPr wrap="square" rtlCol="0" anchor="ctr"/>
@@ -14539,7 +15108,7 @@
     </a:clrScheme>
     <a:fontScheme name="Office">
       <a:majorFont>
-        <a:latin typeface="Calibri Light"/>
+        <a:latin typeface="Calibri Light" panose="020F0302020204030204"/>
         <a:ea typeface=""/>
         <a:cs typeface=""/>
         <a:font script="Jpan" typeface="游ゴシック Light"/>
@@ -14572,9 +15141,26 @@
         <a:font script="Viet" typeface="Times New Roman"/>
         <a:font script="Uigh" typeface="Microsoft Uighur"/>
         <a:font script="Geor" typeface="Sylfaen"/>
+        <a:font script="Armn" typeface="Arial"/>
+        <a:font script="Bugi" typeface="Leelawadee UI"/>
+        <a:font script="Bopo" typeface="Microsoft JhengHei"/>
+        <a:font script="Java" typeface="Javanese Text"/>
+        <a:font script="Lisu" typeface="Segoe UI"/>
+        <a:font script="Mymr" typeface="Myanmar Text"/>
+        <a:font script="Nkoo" typeface="Ebrima"/>
+        <a:font script="Olck" typeface="Nirmala UI"/>
+        <a:font script="Osma" typeface="Ebrima"/>
+        <a:font script="Phag" typeface="Phagspa"/>
+        <a:font script="Syrn" typeface="Estrangelo Edessa"/>
+        <a:font script="Syrj" typeface="Estrangelo Edessa"/>
+        <a:font script="Syre" typeface="Estrangelo Edessa"/>
+        <a:font script="Sora" typeface="Nirmala UI"/>
+        <a:font script="Tale" typeface="Microsoft Tai Le"/>
+        <a:font script="Talu" typeface="Microsoft New Tai Lue"/>
+        <a:font script="Tfng" typeface="Ebrima"/>
       </a:majorFont>
       <a:minorFont>
-        <a:latin typeface="Calibri"/>
+        <a:latin typeface="Calibri" panose="020F0502020204030204"/>
         <a:ea typeface=""/>
         <a:cs typeface=""/>
         <a:font script="Jpan" typeface="游ゴシック"/>
@@ -14607,6 +15193,23 @@
         <a:font script="Viet" typeface="Arial"/>
         <a:font script="Uigh" typeface="Microsoft Uighur"/>
         <a:font script="Geor" typeface="Sylfaen"/>
+        <a:font script="Armn" typeface="Arial"/>
+        <a:font script="Bugi" typeface="Leelawadee UI"/>
+        <a:font script="Bopo" typeface="Microsoft JhengHei"/>
+        <a:font script="Java" typeface="Javanese Text"/>
+        <a:font script="Lisu" typeface="Segoe UI"/>
+        <a:font script="Mymr" typeface="Myanmar Text"/>
+        <a:font script="Nkoo" typeface="Ebrima"/>
+        <a:font script="Olck" typeface="Nirmala UI"/>
+        <a:font script="Osma" typeface="Ebrima"/>
+        <a:font script="Phag" typeface="Phagspa"/>
+        <a:font script="Syrn" typeface="Estrangelo Edessa"/>
+        <a:font script="Syrj" typeface="Estrangelo Edessa"/>
+        <a:font script="Syre" typeface="Estrangelo Edessa"/>
+        <a:font script="Sora" typeface="Nirmala UI"/>
+        <a:font script="Tale" typeface="Microsoft Tai Le"/>
+        <a:font script="Talu" typeface="Microsoft New Tai Lue"/>
+        <a:font script="Tfng" typeface="Ebrima"/>
       </a:minorFont>
     </a:fontScheme>
     <a:fmtScheme name="Office">
@@ -14747,6 +15350,8 @@
       </a:bgFillStyleLst>
     </a:fmtScheme>
   </a:themeElements>
+  <a:objectDefaults/>
+  <a:extraClrSchemeLst/>
   <a:extLst>
     <a:ext uri="{05A4C25C-085E-4340-85A3-A5531E510DB2}">
       <thm15:themeFamily xmlns:thm15="http://schemas.microsoft.com/office/thememl/2012/main" name="Office Theme" id="{62F939B6-93AF-4DB8-9C6B-D6C7DFDC589F}" vid="{4A3C46E8-61CC-4603-A589-7422A47A8E4A}"/>
@@ -14798,7 +15403,7 @@
     </a:clrScheme>
     <a:fontScheme name="Office">
       <a:majorFont>
-        <a:latin typeface="Aptos Display"/>
+        <a:latin typeface="Aptos Display" panose="02110004020202020204"/>
         <a:ea typeface=""/>
         <a:cs typeface=""/>
         <a:font script="Jpan" typeface="游ゴシック Light"/>
@@ -14831,9 +15436,26 @@
         <a:font script="Viet" typeface="Times New Roman"/>
         <a:font script="Uigh" typeface="Microsoft Uighur"/>
         <a:font script="Geor" typeface="Sylfaen"/>
+        <a:font script="Armn" typeface="Arial"/>
+        <a:font script="Bugi" typeface="Leelawadee UI"/>
+        <a:font script="Bopo" typeface="Microsoft JhengHei"/>
+        <a:font script="Java" typeface="Javanese Text"/>
+        <a:font script="Lisu" typeface="Segoe UI"/>
+        <a:font script="Mymr" typeface="Myanmar Text"/>
+        <a:font script="Nkoo" typeface="Ebrima"/>
+        <a:font script="Olck" typeface="Nirmala UI"/>
+        <a:font script="Osma" typeface="Ebrima"/>
+        <a:font script="Phag" typeface="Phagspa"/>
+        <a:font script="Syrn" typeface="Estrangelo Edessa"/>
+        <a:font script="Syrj" typeface="Estrangelo Edessa"/>
+        <a:font script="Syre" typeface="Estrangelo Edessa"/>
+        <a:font script="Sora" typeface="Nirmala UI"/>
+        <a:font script="Tale" typeface="Microsoft Tai Le"/>
+        <a:font script="Talu" typeface="Microsoft New Tai Lue"/>
+        <a:font script="Tfng" typeface="Ebrima"/>
       </a:majorFont>
       <a:minorFont>
-        <a:latin typeface="Aptos"/>
+        <a:latin typeface="Aptos" panose="02110004020202020204"/>
         <a:ea typeface=""/>
         <a:cs typeface=""/>
         <a:font script="Jpan" typeface="游ゴシック"/>
@@ -14866,6 +15488,23 @@
         <a:font script="Viet" typeface="Arial"/>
         <a:font script="Uigh" typeface="Microsoft Uighur"/>
         <a:font script="Geor" typeface="Sylfaen"/>
+        <a:font script="Armn" typeface="Arial"/>
+        <a:font script="Bugi" typeface="Leelawadee UI"/>
+        <a:font script="Bopo" typeface="Microsoft JhengHei"/>
+        <a:font script="Java" typeface="Javanese Text"/>
+        <a:font script="Lisu" typeface="Segoe UI"/>
+        <a:font script="Mymr" typeface="Myanmar Text"/>
+        <a:font script="Nkoo" typeface="Ebrima"/>
+        <a:font script="Olck" typeface="Nirmala UI"/>
+        <a:font script="Osma" typeface="Ebrima"/>
+        <a:font script="Phag" typeface="Phagspa"/>
+        <a:font script="Syrn" typeface="Estrangelo Edessa"/>
+        <a:font script="Syrj" typeface="Estrangelo Edessa"/>
+        <a:font script="Syre" typeface="Estrangelo Edessa"/>
+        <a:font script="Sora" typeface="Nirmala UI"/>
+        <a:font script="Tale" typeface="Microsoft Tai Le"/>
+        <a:font script="Talu" typeface="Microsoft New Tai Lue"/>
+        <a:font script="Tfng" typeface="Ebrima"/>
       </a:minorFont>
     </a:fontScheme>
     <a:fmtScheme name="Office">
@@ -15027,9 +15666,10 @@
       </a:style>
     </a:lnDef>
   </a:objectDefaults>
+  <a:extraClrSchemeLst/>
   <a:extLst>
     <a:ext uri="{05A4C25C-085E-4340-85A3-A5531E510DB2}">
-      <thm15:themeFamily xmlns:thm15="http://schemas.microsoft.com/office/thememl/2012/main" name="Office Theme" id="{62F939B6-93AF-4DB8-9C6B-D6C7DFDC589F}" vid="{4A3C46E8-61CC-4603-A589-7422A47A8E4A}"/>
+      <thm15:themeFamily xmlns:thm15="http://schemas.microsoft.com/office/thememl/2012/main" name="Office Theme" id="{2E142A2C-CD16-42D6-873A-C26D2A0506FA}" vid="{1BDDFF52-6CD6-40A5-AB3C-68EB2F1E4D0A}"/>
     </a:ext>
   </a:extLst>
 </a:theme>
